--- a/docs/base_slides.pptx
+++ b/docs/base_slides.pptx
@@ -5,16 +5,17 @@
     <p:sldMasterId id="2147483648" r:id="rId1"/>
   </p:sldMasterIdLst>
   <p:notesMasterIdLst>
-    <p:notesMasterId r:id="rId9"/>
+    <p:notesMasterId r:id="rId10"/>
   </p:notesMasterIdLst>
   <p:sldIdLst>
     <p:sldId id="1574" r:id="rId2"/>
     <p:sldId id="1581" r:id="rId3"/>
     <p:sldId id="1580" r:id="rId4"/>
-    <p:sldId id="1577" r:id="rId5"/>
-    <p:sldId id="1582" r:id="rId6"/>
-    <p:sldId id="1583" r:id="rId7"/>
-    <p:sldId id="1628" r:id="rId8"/>
+    <p:sldId id="1596" r:id="rId5"/>
+    <p:sldId id="1577" r:id="rId6"/>
+    <p:sldId id="1582" r:id="rId7"/>
+    <p:sldId id="1583" r:id="rId8"/>
+    <p:sldId id="1628" r:id="rId9"/>
   </p:sldIdLst>
   <p:sldSz cx="12192000" cy="6858000"/>
   <p:notesSz cx="6858000" cy="9144000"/>
@@ -121,6 +122,7 @@
             <p14:sldId id="1574"/>
             <p14:sldId id="1581"/>
             <p14:sldId id="1580"/>
+            <p14:sldId id="1596"/>
             <p14:sldId id="1577"/>
             <p14:sldId id="1582"/>
             <p14:sldId id="1583"/>
@@ -136,316 +138,37 @@
 </p:presentation>
 </file>
 
+<file path=ppt/revisionInfo.xml><?xml version="1.0" encoding="utf-8"?>
+<p1510:revInfo xmlns:a="http://schemas.openxmlformats.org/drawingml/2006/main" xmlns:r="http://schemas.openxmlformats.org/officeDocument/2006/relationships" xmlns:p1510="http://schemas.microsoft.com/office/powerpoint/2015/10/main">
+  <p1510:revLst>
+    <p1510:client id="{7CE72004-61F2-4D6D-B395-3F69B2DB77B9}" v="6" dt="2026-02-22T11:40:56.865"/>
+  </p1510:revLst>
+</p1510:revInfo>
+</file>
+
 <file path=ppt/changesInfos/changesInfo1.xml><?xml version="1.0" encoding="utf-8"?>
 <pc:chgInfo xmlns:a="http://schemas.openxmlformats.org/drawingml/2006/main" xmlns:r="http://schemas.openxmlformats.org/officeDocument/2006/relationships" xmlns:ac="http://schemas.microsoft.com/office/drawing/2013/main/command" xmlns:pc="http://schemas.microsoft.com/office/powerpoint/2013/main/command">
   <pc:docChgLst>
-    <pc:chgData name="חן פרידמן" userId="bcd6e6b1-6b56-4e54-af8d-4432b359a0fe" providerId="ADAL" clId="{ACE5DC10-28ED-45B3-AF90-6C4947596268}"/>
-    <pc:docChg chg="undo custSel addSld delSld modSld sldOrd">
-      <pc:chgData name="חן פרידמן" userId="bcd6e6b1-6b56-4e54-af8d-4432b359a0fe" providerId="ADAL" clId="{ACE5DC10-28ED-45B3-AF90-6C4947596268}" dt="2025-12-21T11:51:30.649" v="225" actId="20577"/>
+    <pc:chgData name="Rami Puzis (BGU)" userId="15455a32-cfa8-4f75-8502-2ebc95aecdb5" providerId="ADAL" clId="{4604D058-1A9B-4964-A759-971FC0161111}"/>
+    <pc:docChg chg="custSel modSld">
+      <pc:chgData name="Rami Puzis (BGU)" userId="15455a32-cfa8-4f75-8502-2ebc95aecdb5" providerId="ADAL" clId="{4604D058-1A9B-4964-A759-971FC0161111}" dt="2026-02-22T11:42:08.251" v="89" actId="20577"/>
       <pc:docMkLst>
         <pc:docMk/>
       </pc:docMkLst>
-      <pc:sldChg chg="modSp">
-        <pc:chgData name="חן פרידמן" userId="bcd6e6b1-6b56-4e54-af8d-4432b359a0fe" providerId="ADAL" clId="{ACE5DC10-28ED-45B3-AF90-6C4947596268}" dt="2025-12-21T11:14:02.598" v="49" actId="20577"/>
+      <pc:sldChg chg="modSp mod">
+        <pc:chgData name="Rami Puzis (BGU)" userId="15455a32-cfa8-4f75-8502-2ebc95aecdb5" providerId="ADAL" clId="{4604D058-1A9B-4964-A759-971FC0161111}" dt="2026-02-22T11:42:08.251" v="89" actId="20577"/>
         <pc:sldMkLst>
           <pc:docMk/>
-          <pc:sldMk cId="132160383" sldId="1574"/>
+          <pc:sldMk cId="2564283967" sldId="1581"/>
         </pc:sldMkLst>
-        <pc:spChg chg="mod">
-          <ac:chgData name="חן פרידמן" userId="bcd6e6b1-6b56-4e54-af8d-4432b359a0fe" providerId="ADAL" clId="{ACE5DC10-28ED-45B3-AF90-6C4947596268}" dt="2025-12-21T11:14:02.598" v="49" actId="20577"/>
-          <ac:spMkLst>
+        <pc:graphicFrameChg chg="mod modGraphic">
+          <ac:chgData name="Rami Puzis (BGU)" userId="15455a32-cfa8-4f75-8502-2ebc95aecdb5" providerId="ADAL" clId="{4604D058-1A9B-4964-A759-971FC0161111}" dt="2026-02-22T11:42:08.251" v="89" actId="20577"/>
+          <ac:graphicFrameMkLst>
             <pc:docMk/>
-            <pc:sldMk cId="132160383" sldId="1574"/>
-            <ac:spMk id="6" creationId="{B553B468-8035-4F27-9A10-D7A4E7C759F1}"/>
-          </ac:spMkLst>
-        </pc:spChg>
-      </pc:sldChg>
-      <pc:sldChg chg="del">
-        <pc:chgData name="חן פרידמן" userId="bcd6e6b1-6b56-4e54-af8d-4432b359a0fe" providerId="ADAL" clId="{ACE5DC10-28ED-45B3-AF90-6C4947596268}" dt="2025-12-21T11:12:08.976" v="4" actId="2696"/>
-        <pc:sldMkLst>
-          <pc:docMk/>
-          <pc:sldMk cId="3172543812" sldId="1667"/>
-        </pc:sldMkLst>
-      </pc:sldChg>
-      <pc:sldChg chg="addSp delSp modSp add">
-        <pc:chgData name="חן פרידמן" userId="bcd6e6b1-6b56-4e54-af8d-4432b359a0fe" providerId="ADAL" clId="{ACE5DC10-28ED-45B3-AF90-6C4947596268}" dt="2025-12-21T11:12:25.273" v="15" actId="478"/>
-        <pc:sldMkLst>
-          <pc:docMk/>
-          <pc:sldMk cId="2570145380" sldId="1668"/>
-        </pc:sldMkLst>
-        <pc:spChg chg="del">
-          <ac:chgData name="חן פרידמן" userId="bcd6e6b1-6b56-4e54-af8d-4432b359a0fe" providerId="ADAL" clId="{ACE5DC10-28ED-45B3-AF90-6C4947596268}" dt="2025-12-21T11:12:25.273" v="15" actId="478"/>
-          <ac:spMkLst>
-            <pc:docMk/>
-            <pc:sldMk cId="2570145380" sldId="1668"/>
-            <ac:spMk id="2" creationId="{611C8480-7996-425D-8334-60680BA9CF3A}"/>
-          </ac:spMkLst>
-        </pc:spChg>
-        <pc:spChg chg="del mod">
-          <ac:chgData name="חן פרידמן" userId="bcd6e6b1-6b56-4e54-af8d-4432b359a0fe" providerId="ADAL" clId="{ACE5DC10-28ED-45B3-AF90-6C4947596268}" dt="2025-12-21T11:12:06.714" v="3"/>
-          <ac:spMkLst>
-            <pc:docMk/>
-            <pc:sldMk cId="2570145380" sldId="1668"/>
-            <ac:spMk id="3" creationId="{EDAF9AAB-1EED-42C4-960F-4BF899666680}"/>
-          </ac:spMkLst>
-        </pc:spChg>
-        <pc:picChg chg="add mod">
-          <ac:chgData name="חן פרידמן" userId="bcd6e6b1-6b56-4e54-af8d-4432b359a0fe" providerId="ADAL" clId="{ACE5DC10-28ED-45B3-AF90-6C4947596268}" dt="2025-12-21T11:12:24.136" v="14" actId="1076"/>
-          <ac:picMkLst>
-            <pc:docMk/>
-            <pc:sldMk cId="2570145380" sldId="1668"/>
-            <ac:picMk id="6" creationId="{2F133023-E1FA-4D9A-A1DB-DDDFD4905063}"/>
-          </ac:picMkLst>
-        </pc:picChg>
-        <pc:picChg chg="add del mod">
-          <ac:chgData name="חן פרידמן" userId="bcd6e6b1-6b56-4e54-af8d-4432b359a0fe" providerId="ADAL" clId="{ACE5DC10-28ED-45B3-AF90-6C4947596268}" dt="2025-12-21T11:12:22.136" v="13" actId="478"/>
-          <ac:picMkLst>
-            <pc:docMk/>
-            <pc:sldMk cId="2570145380" sldId="1668"/>
-            <ac:picMk id="8" creationId="{7BFC025C-0ED8-410B-B11F-6AAC0560BCE9}"/>
-          </ac:picMkLst>
-        </pc:picChg>
-        <pc:picChg chg="add del mod">
-          <ac:chgData name="חן פרידמן" userId="bcd6e6b1-6b56-4e54-af8d-4432b359a0fe" providerId="ADAL" clId="{ACE5DC10-28ED-45B3-AF90-6C4947596268}" dt="2025-12-21T11:12:20.713" v="12" actId="478"/>
-          <ac:picMkLst>
-            <pc:docMk/>
-            <pc:sldMk cId="2570145380" sldId="1668"/>
-            <ac:picMk id="10" creationId="{E61A6B70-CAD7-4BDA-B50A-47009B4E9FE3}"/>
-          </ac:picMkLst>
-        </pc:picChg>
-      </pc:sldChg>
-      <pc:sldChg chg="del">
-        <pc:chgData name="חן פרידמן" userId="bcd6e6b1-6b56-4e54-af8d-4432b359a0fe" providerId="ADAL" clId="{ACE5DC10-28ED-45B3-AF90-6C4947596268}" dt="2025-12-21T11:11:51.180" v="0" actId="2696"/>
-        <pc:sldMkLst>
-          <pc:docMk/>
-          <pc:sldMk cId="3698545494" sldId="1668"/>
-        </pc:sldMkLst>
-      </pc:sldChg>
-      <pc:sldChg chg="add">
-        <pc:chgData name="חן פרידמן" userId="bcd6e6b1-6b56-4e54-af8d-4432b359a0fe" providerId="ADAL" clId="{ACE5DC10-28ED-45B3-AF90-6C4947596268}" dt="2025-12-21T11:12:10.511" v="5"/>
-        <pc:sldMkLst>
-          <pc:docMk/>
-          <pc:sldMk cId="3180822841" sldId="1669"/>
-        </pc:sldMkLst>
-      </pc:sldChg>
-      <pc:sldChg chg="addSp delSp modSp add ord">
-        <pc:chgData name="חן פרידמן" userId="bcd6e6b1-6b56-4e54-af8d-4432b359a0fe" providerId="ADAL" clId="{ACE5DC10-28ED-45B3-AF90-6C4947596268}" dt="2025-12-21T11:12:19.728" v="11"/>
-        <pc:sldMkLst>
-          <pc:docMk/>
-          <pc:sldMk cId="2758228725" sldId="1670"/>
-        </pc:sldMkLst>
-        <pc:spChg chg="del">
-          <ac:chgData name="חן פרידמן" userId="bcd6e6b1-6b56-4e54-af8d-4432b359a0fe" providerId="ADAL" clId="{ACE5DC10-28ED-45B3-AF90-6C4947596268}" dt="2025-12-21T11:12:16.249" v="9" actId="478"/>
-          <ac:spMkLst>
-            <pc:docMk/>
-            <pc:sldMk cId="2758228725" sldId="1670"/>
-            <ac:spMk id="2" creationId="{611C8480-7996-425D-8334-60680BA9CF3A}"/>
-          </ac:spMkLst>
-        </pc:spChg>
-        <pc:spChg chg="add del mod">
-          <ac:chgData name="חן פרידמן" userId="bcd6e6b1-6b56-4e54-af8d-4432b359a0fe" providerId="ADAL" clId="{ACE5DC10-28ED-45B3-AF90-6C4947596268}" dt="2025-12-21T11:12:17.702" v="10" actId="478"/>
-          <ac:spMkLst>
-            <pc:docMk/>
-            <pc:sldMk cId="2758228725" sldId="1670"/>
-            <ac:spMk id="5" creationId="{E6D37E27-E3B0-495E-9BAE-B828BF003926}"/>
-          </ac:spMkLst>
-        </pc:spChg>
-        <pc:picChg chg="del">
-          <ac:chgData name="חן פרידמן" userId="bcd6e6b1-6b56-4e54-af8d-4432b359a0fe" providerId="ADAL" clId="{ACE5DC10-28ED-45B3-AF90-6C4947596268}" dt="2025-12-21T11:12:14.748" v="8" actId="478"/>
-          <ac:picMkLst>
-            <pc:docMk/>
-            <pc:sldMk cId="2758228725" sldId="1670"/>
-            <ac:picMk id="6" creationId="{2F133023-E1FA-4D9A-A1DB-DDDFD4905063}"/>
-          </ac:picMkLst>
-        </pc:picChg>
-        <pc:picChg chg="del">
-          <ac:chgData name="חן פרידמן" userId="bcd6e6b1-6b56-4e54-af8d-4432b359a0fe" providerId="ADAL" clId="{ACE5DC10-28ED-45B3-AF90-6C4947596268}" dt="2025-12-21T11:12:13.433" v="7" actId="478"/>
-          <ac:picMkLst>
-            <pc:docMk/>
-            <pc:sldMk cId="2758228725" sldId="1670"/>
-            <ac:picMk id="10" creationId="{E61A6B70-CAD7-4BDA-B50A-47009B4E9FE3}"/>
-          </ac:picMkLst>
-        </pc:picChg>
-      </pc:sldChg>
-      <pc:sldChg chg="addSp delSp modSp add">
-        <pc:chgData name="חן פרידמן" userId="bcd6e6b1-6b56-4e54-af8d-4432b359a0fe" providerId="ADAL" clId="{ACE5DC10-28ED-45B3-AF90-6C4947596268}" dt="2025-12-21T11:13:44.014" v="36" actId="1076"/>
-        <pc:sldMkLst>
-          <pc:docMk/>
-          <pc:sldMk cId="1890324457" sldId="1671"/>
-        </pc:sldMkLst>
-        <pc:spChg chg="del">
-          <ac:chgData name="חן פרידמן" userId="bcd6e6b1-6b56-4e54-af8d-4432b359a0fe" providerId="ADAL" clId="{ACE5DC10-28ED-45B3-AF90-6C4947596268}" dt="2025-12-21T11:13:02.776" v="19" actId="478"/>
-          <ac:spMkLst>
-            <pc:docMk/>
-            <pc:sldMk cId="1890324457" sldId="1671"/>
-            <ac:spMk id="2" creationId="{4534A598-5C48-4C65-AE5A-E2DB7ACCD4E2}"/>
-          </ac:spMkLst>
-        </pc:spChg>
-        <pc:spChg chg="del">
-          <ac:chgData name="חן פרידמן" userId="bcd6e6b1-6b56-4e54-af8d-4432b359a0fe" providerId="ADAL" clId="{ACE5DC10-28ED-45B3-AF90-6C4947596268}" dt="2025-12-21T11:13:01.043" v="18"/>
-          <ac:spMkLst>
-            <pc:docMk/>
-            <pc:sldMk cId="1890324457" sldId="1671"/>
-            <ac:spMk id="3" creationId="{5445E6B7-55E5-4ED2-B890-06BB48E5CBE8}"/>
-          </ac:spMkLst>
-        </pc:spChg>
-        <pc:spChg chg="add">
-          <ac:chgData name="חן פרידמן" userId="bcd6e6b1-6b56-4e54-af8d-4432b359a0fe" providerId="ADAL" clId="{ACE5DC10-28ED-45B3-AF90-6C4947596268}" dt="2025-12-21T11:12:49.162" v="17"/>
-          <ac:spMkLst>
-            <pc:docMk/>
-            <pc:sldMk cId="1890324457" sldId="1671"/>
-            <ac:spMk id="5" creationId="{5A237CFF-B177-42ED-BEA5-BC519A06AD66}"/>
-          </ac:spMkLst>
-        </pc:spChg>
-        <pc:picChg chg="add mod">
-          <ac:chgData name="חן פרידמן" userId="bcd6e6b1-6b56-4e54-af8d-4432b359a0fe" providerId="ADAL" clId="{ACE5DC10-28ED-45B3-AF90-6C4947596268}" dt="2025-12-21T11:13:44.014" v="36" actId="1076"/>
-          <ac:picMkLst>
-            <pc:docMk/>
-            <pc:sldMk cId="1890324457" sldId="1671"/>
-            <ac:picMk id="7" creationId="{BCF6D5A2-3487-41EC-9FB0-B4D22C56DA05}"/>
-          </ac:picMkLst>
-        </pc:picChg>
-        <pc:picChg chg="add mod">
-          <ac:chgData name="חן פרידמן" userId="bcd6e6b1-6b56-4e54-af8d-4432b359a0fe" providerId="ADAL" clId="{ACE5DC10-28ED-45B3-AF90-6C4947596268}" dt="2025-12-21T11:13:42.446" v="35" actId="1076"/>
-          <ac:picMkLst>
-            <pc:docMk/>
-            <pc:sldMk cId="1890324457" sldId="1671"/>
-            <ac:picMk id="8" creationId="{6456F3BF-855C-4B07-B655-11FA129733AC}"/>
-          </ac:picMkLst>
-        </pc:picChg>
-      </pc:sldChg>
-      <pc:sldChg chg="modSp add">
-        <pc:chgData name="חן פרידמן" userId="bcd6e6b1-6b56-4e54-af8d-4432b359a0fe" providerId="ADAL" clId="{ACE5DC10-28ED-45B3-AF90-6C4947596268}" dt="2025-12-21T11:23:02.651" v="127" actId="20577"/>
-        <pc:sldMkLst>
-          <pc:docMk/>
-          <pc:sldMk cId="1046037921" sldId="1672"/>
-        </pc:sldMkLst>
-        <pc:spChg chg="mod">
-          <ac:chgData name="חן פרידמן" userId="bcd6e6b1-6b56-4e54-af8d-4432b359a0fe" providerId="ADAL" clId="{ACE5DC10-28ED-45B3-AF90-6C4947596268}" dt="2025-12-21T11:15:09.268" v="67" actId="20577"/>
-          <ac:spMkLst>
-            <pc:docMk/>
-            <pc:sldMk cId="1046037921" sldId="1672"/>
-            <ac:spMk id="2" creationId="{C64B55AE-1C64-4DB8-BABF-92DAD5071A9E}"/>
-          </ac:spMkLst>
-        </pc:spChg>
-        <pc:spChg chg="mod">
-          <ac:chgData name="חן פרידמן" userId="bcd6e6b1-6b56-4e54-af8d-4432b359a0fe" providerId="ADAL" clId="{ACE5DC10-28ED-45B3-AF90-6C4947596268}" dt="2025-12-21T11:23:02.651" v="127" actId="20577"/>
-          <ac:spMkLst>
-            <pc:docMk/>
-            <pc:sldMk cId="1046037921" sldId="1672"/>
-            <ac:spMk id="3" creationId="{1C82B475-3B25-4157-A709-6826BE9F3579}"/>
-          </ac:spMkLst>
-        </pc:spChg>
-      </pc:sldChg>
-      <pc:sldChg chg="addSp delSp modSp add del">
-        <pc:chgData name="חן פרידמן" userId="bcd6e6b1-6b56-4e54-af8d-4432b359a0fe" providerId="ADAL" clId="{ACE5DC10-28ED-45B3-AF90-6C4947596268}" dt="2025-12-21T11:13:46.877" v="37" actId="2696"/>
-        <pc:sldMkLst>
-          <pc:docMk/>
-          <pc:sldMk cId="3924862743" sldId="1672"/>
-        </pc:sldMkLst>
-        <pc:spChg chg="del">
-          <ac:chgData name="חן פרידמן" userId="bcd6e6b1-6b56-4e54-af8d-4432b359a0fe" providerId="ADAL" clId="{ACE5DC10-28ED-45B3-AF90-6C4947596268}" dt="2025-12-21T11:13:21.215" v="23" actId="478"/>
-          <ac:spMkLst>
-            <pc:docMk/>
-            <pc:sldMk cId="3924862743" sldId="1672"/>
-            <ac:spMk id="2" creationId="{6031BB85-E542-4542-A794-C08DBE02854C}"/>
-          </ac:spMkLst>
-        </pc:spChg>
-        <pc:spChg chg="del">
-          <ac:chgData name="חן פרידמן" userId="bcd6e6b1-6b56-4e54-af8d-4432b359a0fe" providerId="ADAL" clId="{ACE5DC10-28ED-45B3-AF90-6C4947596268}" dt="2025-12-21T11:13:19.137" v="22"/>
-          <ac:spMkLst>
-            <pc:docMk/>
-            <pc:sldMk cId="3924862743" sldId="1672"/>
-            <ac:spMk id="3" creationId="{4D874549-3564-4703-86DA-A74F5158E332}"/>
-          </ac:spMkLst>
-        </pc:spChg>
-        <pc:spChg chg="add mod">
-          <ac:chgData name="חן פרידמן" userId="bcd6e6b1-6b56-4e54-af8d-4432b359a0fe" providerId="ADAL" clId="{ACE5DC10-28ED-45B3-AF90-6C4947596268}" dt="2025-12-21T11:13:32.266" v="30"/>
-          <ac:spMkLst>
-            <pc:docMk/>
-            <pc:sldMk cId="3924862743" sldId="1672"/>
-            <ac:spMk id="7" creationId="{B4F41F94-C103-43F8-B4D2-AEE75DE07D50}"/>
-          </ac:spMkLst>
-        </pc:spChg>
-        <pc:picChg chg="add del mod">
-          <ac:chgData name="חן פרידמן" userId="bcd6e6b1-6b56-4e54-af8d-4432b359a0fe" providerId="ADAL" clId="{ACE5DC10-28ED-45B3-AF90-6C4947596268}" dt="2025-12-21T11:13:32.266" v="30"/>
-          <ac:picMkLst>
-            <pc:docMk/>
-            <pc:sldMk cId="3924862743" sldId="1672"/>
-            <ac:picMk id="6" creationId="{2E135506-04B0-4D80-B25C-C23C8A0DBE95}"/>
-          </ac:picMkLst>
-        </pc:picChg>
-      </pc:sldChg>
-      <pc:sldChg chg="addSp delSp modSp add">
-        <pc:chgData name="חן פרידמן" userId="bcd6e6b1-6b56-4e54-af8d-4432b359a0fe" providerId="ADAL" clId="{ACE5DC10-28ED-45B3-AF90-6C4947596268}" dt="2025-12-21T11:51:30.649" v="225" actId="20577"/>
-        <pc:sldMkLst>
-          <pc:docMk/>
-          <pc:sldMk cId="3651782336" sldId="1673"/>
-        </pc:sldMkLst>
-        <pc:spChg chg="del">
-          <ac:chgData name="חן פרידמן" userId="bcd6e6b1-6b56-4e54-af8d-4432b359a0fe" providerId="ADAL" clId="{ACE5DC10-28ED-45B3-AF90-6C4947596268}" dt="2025-12-21T11:18:20.768" v="107" actId="478"/>
-          <ac:spMkLst>
-            <pc:docMk/>
-            <pc:sldMk cId="3651782336" sldId="1673"/>
-            <ac:spMk id="2" creationId="{0FAB2C54-B502-40B6-BC64-213E566F52CA}"/>
-          </ac:spMkLst>
-        </pc:spChg>
-        <pc:spChg chg="del">
-          <ac:chgData name="חן פרידמן" userId="bcd6e6b1-6b56-4e54-af8d-4432b359a0fe" providerId="ADAL" clId="{ACE5DC10-28ED-45B3-AF90-6C4947596268}" dt="2025-12-21T11:18:16.551" v="104"/>
-          <ac:spMkLst>
-            <pc:docMk/>
-            <pc:sldMk cId="3651782336" sldId="1673"/>
-            <ac:spMk id="3" creationId="{1B2FC6A3-0114-444B-949F-D81FD8FC7496}"/>
-          </ac:spMkLst>
-        </pc:spChg>
-        <pc:spChg chg="add">
-          <ac:chgData name="חן פרידמן" userId="bcd6e6b1-6b56-4e54-af8d-4432b359a0fe" providerId="ADAL" clId="{ACE5DC10-28ED-45B3-AF90-6C4947596268}" dt="2025-12-21T11:18:09.333" v="103"/>
-          <ac:spMkLst>
-            <pc:docMk/>
-            <pc:sldMk cId="3651782336" sldId="1673"/>
-            <ac:spMk id="5" creationId="{3938DE6C-3A22-4C1B-8315-1389478D26D3}"/>
-          </ac:spMkLst>
-        </pc:spChg>
-        <pc:spChg chg="add del mod">
-          <ac:chgData name="חן פרידמן" userId="bcd6e6b1-6b56-4e54-af8d-4432b359a0fe" providerId="ADAL" clId="{ACE5DC10-28ED-45B3-AF90-6C4947596268}" dt="2025-12-21T11:18:19.864" v="106" actId="478"/>
-          <ac:spMkLst>
-            <pc:docMk/>
-            <pc:sldMk cId="3651782336" sldId="1673"/>
-            <ac:spMk id="6" creationId="{A22E1544-B20A-4DCE-954A-3CEEC79DE825}"/>
-          </ac:spMkLst>
-        </pc:spChg>
-        <pc:spChg chg="add">
-          <ac:chgData name="חן פרידמן" userId="bcd6e6b1-6b56-4e54-af8d-4432b359a0fe" providerId="ADAL" clId="{ACE5DC10-28ED-45B3-AF90-6C4947596268}" dt="2025-12-21T11:18:17.953" v="105"/>
-          <ac:spMkLst>
-            <pc:docMk/>
-            <pc:sldMk cId="3651782336" sldId="1673"/>
-            <ac:spMk id="7" creationId="{4C079B29-3544-47A9-9DEF-D9B0BDECDFD2}"/>
-          </ac:spMkLst>
-        </pc:spChg>
-        <pc:spChg chg="add mod">
-          <ac:chgData name="חן פרידמן" userId="bcd6e6b1-6b56-4e54-af8d-4432b359a0fe" providerId="ADAL" clId="{ACE5DC10-28ED-45B3-AF90-6C4947596268}" dt="2025-12-21T11:51:30.649" v="225" actId="20577"/>
-          <ac:spMkLst>
-            <pc:docMk/>
-            <pc:sldMk cId="3651782336" sldId="1673"/>
-            <ac:spMk id="10" creationId="{5DDAE688-B8B9-4580-BCE1-2616ED9EF69D}"/>
-          </ac:spMkLst>
-        </pc:spChg>
-        <pc:spChg chg="add del mod">
-          <ac:chgData name="חן פרידמן" userId="bcd6e6b1-6b56-4e54-af8d-4432b359a0fe" providerId="ADAL" clId="{ACE5DC10-28ED-45B3-AF90-6C4947596268}" dt="2025-12-21T11:22:49.261" v="121" actId="478"/>
-          <ac:spMkLst>
-            <pc:docMk/>
-            <pc:sldMk cId="3651782336" sldId="1673"/>
-            <ac:spMk id="11" creationId="{1853392B-CCFB-4CE6-A8D5-707C6A7B69BC}"/>
-          </ac:spMkLst>
-        </pc:spChg>
-        <pc:picChg chg="add mod">
-          <ac:chgData name="חן פרידמן" userId="bcd6e6b1-6b56-4e54-af8d-4432b359a0fe" providerId="ADAL" clId="{ACE5DC10-28ED-45B3-AF90-6C4947596268}" dt="2025-12-21T11:19:38.659" v="109" actId="1076"/>
-          <ac:picMkLst>
-            <pc:docMk/>
-            <pc:sldMk cId="3651782336" sldId="1673"/>
-            <ac:picMk id="9" creationId="{FEE92867-95D2-4E1E-8C00-88EA64E9635E}"/>
-          </ac:picMkLst>
-        </pc:picChg>
+            <pc:sldMk cId="2564283967" sldId="1581"/>
+            <ac:graphicFrameMk id="6" creationId="{B16D549A-CC57-1C2C-A976-5DA7CC5B8247}"/>
+          </ac:graphicFrameMkLst>
+        </pc:graphicFrameChg>
       </pc:sldChg>
     </pc:docChg>
   </pc:docChgLst>
@@ -1220,9 +943,17 @@
         <a:bodyPr/>
         <a:lstStyle/>
         <a:p>
+          <a:pPr rtl="0"/>
           <a:r>
             <a:rPr lang="en-GB" dirty="0"/>
-            <a:t>The research begins with the hypothesis that successful information operation </a:t>
+            <a:t>Hypothesis: </a:t>
+          </a:r>
+        </a:p>
+        <a:p>
+          <a:pPr rtl="0"/>
+          <a:r>
+            <a:rPr lang="en-GB" dirty="0"/>
+            <a:t>successful information operation </a:t>
           </a:r>
           <a:r>
             <a:rPr lang="en-GB" b="0" dirty="0"/>
@@ -1230,7 +961,7 @@
           </a:r>
           <a:r>
             <a:rPr lang="en-GB" dirty="0"/>
-            <a:t> must </a:t>
+            <a:t> </a:t>
           </a:r>
           <a:r>
             <a:rPr lang="en-GB" b="1" dirty="0"/>
@@ -1246,7 +977,7 @@
           </a:r>
           <a:r>
             <a:rPr lang="en-GB" dirty="0"/>
-            <a:t> with a network of other drivers. </a:t>
+            <a:t> with other drivers. </a:t>
           </a:r>
           <a:endParaRPr lang="en-US" dirty="0"/>
         </a:p>
@@ -1281,25 +1012,44 @@
         <a:bodyPr/>
         <a:lstStyle/>
         <a:p>
+          <a:pPr rtl="0"/>
           <a:r>
             <a:rPr lang="en-GB" dirty="0"/>
-            <a:t>We compute a</a:t>
+            <a:t>Objectives:</a:t>
+          </a:r>
+        </a:p>
+        <a:p>
+          <a:pPr rtl="0"/>
+          <a:r>
+            <a:rPr lang="en-GB" dirty="0"/>
+            <a:t>Author’s </a:t>
           </a:r>
           <a:r>
             <a:rPr lang="en-GB" b="1" dirty="0"/>
-            <a:t> key score </a:t>
+            <a:t>key score </a:t>
+          </a:r>
+          <a:r>
+            <a:rPr lang="en-GB" b="0" dirty="0"/>
+            <a:t>to </a:t>
           </a:r>
           <a:r>
             <a:rPr lang="en-GB" dirty="0"/>
-            <a:t>for each author to quantify topic leadership and construct a </a:t>
+            <a:t>quantify topic leadership. </a:t>
+          </a:r>
+        </a:p>
+        <a:p>
+          <a:pPr rtl="0"/>
+          <a:r>
+            <a:rPr lang="en-GB" b="1" dirty="0"/>
+            <a:t>Backbone graph </a:t>
           </a:r>
           <a:r>
-            <a:rPr lang="en-GB" b="1" dirty="0"/>
-            <a:t>backbone graph </a:t>
+            <a:rPr lang="en-GB" b="0" dirty="0"/>
+            <a:t>to </a:t>
           </a:r>
           <a:r>
             <a:rPr lang="en-GB" dirty="0"/>
-            <a:t>capturing coordination among high-scoring authors. </a:t>
+            <a:t>capture coordination among key authors. </a:t>
           </a:r>
           <a:endParaRPr lang="en-US" dirty="0"/>
         </a:p>
@@ -1334,9 +1084,17 @@
         <a:bodyPr/>
         <a:lstStyle/>
         <a:p>
+          <a:pPr rtl="0"/>
           <a:r>
             <a:rPr lang="en-GB" dirty="0"/>
-            <a:t>Thus, enables the computation of </a:t>
+            <a:t>Goal:</a:t>
+          </a:r>
+        </a:p>
+        <a:p>
+          <a:pPr rtl="0"/>
+          <a:r>
+            <a:rPr lang="en-GB" dirty="0"/>
+            <a:t>Computation of </a:t>
           </a:r>
           <a:r>
             <a:rPr lang="en-GB" b="1" dirty="0"/>
@@ -1702,7 +1460,7 @@
         </a:bodyPr>
         <a:lstStyle/>
         <a:p>
-          <a:pPr marL="0" lvl="0" indent="0" algn="l" defTabSz="1022350">
+          <a:pPr marL="0" lvl="0" indent="0" algn="l" defTabSz="800100" rtl="0">
             <a:lnSpc>
               <a:spcPct val="90000"/>
             </a:lnSpc>
@@ -1715,34 +1473,52 @@
             <a:buNone/>
           </a:pPr>
           <a:r>
-            <a:rPr lang="en-GB" sz="2300" kern="1200" dirty="0"/>
-            <a:t>The research begins with the hypothesis that successful information operation </a:t>
+            <a:rPr lang="en-GB" sz="1800" kern="1200" dirty="0"/>
+            <a:t>Hypothesis: </a:t>
+          </a:r>
+        </a:p>
+        <a:p>
+          <a:pPr marL="0" lvl="0" indent="0" algn="l" defTabSz="800100" rtl="0">
+            <a:lnSpc>
+              <a:spcPct val="90000"/>
+            </a:lnSpc>
+            <a:spcBef>
+              <a:spcPct val="0"/>
+            </a:spcBef>
+            <a:spcAft>
+              <a:spcPct val="35000"/>
+            </a:spcAft>
+            <a:buNone/>
+          </a:pPr>
+          <a:r>
+            <a:rPr lang="en-GB" sz="1800" kern="1200" dirty="0"/>
+            <a:t>successful information operation </a:t>
           </a:r>
           <a:r>
-            <a:rPr lang="en-GB" sz="2300" b="0" kern="1200" dirty="0"/>
+            <a:rPr lang="en-GB" sz="1800" b="0" kern="1200" dirty="0"/>
             <a:t>drivers</a:t>
           </a:r>
           <a:r>
-            <a:rPr lang="en-GB" sz="2300" kern="1200" dirty="0"/>
-            <a:t> must </a:t>
+            <a:rPr lang="en-GB" sz="1800" kern="1200" dirty="0"/>
+            <a:t> </a:t>
           </a:r>
           <a:r>
-            <a:rPr lang="en-GB" sz="2300" b="1" kern="1200" dirty="0"/>
+            <a:rPr lang="en-GB" sz="1800" b="1" kern="1200" dirty="0"/>
             <a:t>lead topic-level discourse </a:t>
           </a:r>
           <a:r>
-            <a:rPr lang="en-GB" sz="2300" kern="1200" dirty="0"/>
+            <a:rPr lang="en-GB" sz="1800" kern="1200" dirty="0"/>
             <a:t>and act in </a:t>
           </a:r>
           <a:r>
-            <a:rPr lang="en-GB" sz="2300" b="1" kern="1200" dirty="0"/>
+            <a:rPr lang="en-GB" sz="1800" b="1" kern="1200" dirty="0"/>
             <a:t>coordination</a:t>
           </a:r>
           <a:r>
-            <a:rPr lang="en-GB" sz="2300" kern="1200" dirty="0"/>
-            <a:t> with a network of other drivers. </a:t>
+            <a:rPr lang="en-GB" sz="1800" kern="1200" dirty="0"/>
+            <a:t> with other drivers. </a:t>
           </a:r>
-          <a:endParaRPr lang="en-US" sz="2300" kern="1200" dirty="0"/>
+          <a:endParaRPr lang="en-US" sz="1800" kern="1200" dirty="0"/>
         </a:p>
       </dsp:txBody>
       <dsp:txXfrm>
@@ -1877,7 +1653,7 @@
         </a:bodyPr>
         <a:lstStyle/>
         <a:p>
-          <a:pPr marL="0" lvl="0" indent="0" algn="l" defTabSz="1022350">
+          <a:pPr marL="0" lvl="0" indent="0" algn="l" defTabSz="800100" rtl="0">
             <a:lnSpc>
               <a:spcPct val="90000"/>
             </a:lnSpc>
@@ -1890,26 +1666,66 @@
             <a:buNone/>
           </a:pPr>
           <a:r>
-            <a:rPr lang="en-GB" sz="2300" kern="1200" dirty="0"/>
-            <a:t>We compute a</a:t>
+            <a:rPr lang="en-GB" sz="1800" kern="1200" dirty="0"/>
+            <a:t>Objectives:</a:t>
+          </a:r>
+        </a:p>
+        <a:p>
+          <a:pPr marL="0" lvl="0" indent="0" algn="l" defTabSz="800100" rtl="0">
+            <a:lnSpc>
+              <a:spcPct val="90000"/>
+            </a:lnSpc>
+            <a:spcBef>
+              <a:spcPct val="0"/>
+            </a:spcBef>
+            <a:spcAft>
+              <a:spcPct val="35000"/>
+            </a:spcAft>
+            <a:buNone/>
+          </a:pPr>
+          <a:r>
+            <a:rPr lang="en-GB" sz="1800" kern="1200" dirty="0"/>
+            <a:t>Author’s </a:t>
           </a:r>
           <a:r>
-            <a:rPr lang="en-GB" sz="2300" b="1" kern="1200" dirty="0"/>
-            <a:t> key score </a:t>
+            <a:rPr lang="en-GB" sz="1800" b="1" kern="1200" dirty="0"/>
+            <a:t>key score </a:t>
           </a:r>
           <a:r>
-            <a:rPr lang="en-GB" sz="2300" kern="1200" dirty="0"/>
-            <a:t>for each author to quantify topic leadership and construct a </a:t>
+            <a:rPr lang="en-GB" sz="1800" b="0" kern="1200" dirty="0"/>
+            <a:t>to </a:t>
           </a:r>
           <a:r>
-            <a:rPr lang="en-GB" sz="2300" b="1" kern="1200" dirty="0"/>
-            <a:t>backbone graph </a:t>
+            <a:rPr lang="en-GB" sz="1800" kern="1200" dirty="0"/>
+            <a:t>quantify topic leadership. </a:t>
+          </a:r>
+        </a:p>
+        <a:p>
+          <a:pPr marL="0" lvl="0" indent="0" algn="l" defTabSz="800100" rtl="0">
+            <a:lnSpc>
+              <a:spcPct val="90000"/>
+            </a:lnSpc>
+            <a:spcBef>
+              <a:spcPct val="0"/>
+            </a:spcBef>
+            <a:spcAft>
+              <a:spcPct val="35000"/>
+            </a:spcAft>
+            <a:buNone/>
+          </a:pPr>
+          <a:r>
+            <a:rPr lang="en-GB" sz="1800" b="1" kern="1200" dirty="0"/>
+            <a:t>Backbone graph </a:t>
           </a:r>
           <a:r>
-            <a:rPr lang="en-GB" sz="2300" kern="1200" dirty="0"/>
-            <a:t>capturing coordination among high-scoring authors. </a:t>
+            <a:rPr lang="en-GB" sz="1800" b="0" kern="1200" dirty="0"/>
+            <a:t>to </a:t>
           </a:r>
-          <a:endParaRPr lang="en-US" sz="2300" kern="1200" dirty="0"/>
+          <a:r>
+            <a:rPr lang="en-GB" sz="1800" kern="1200" dirty="0"/>
+            <a:t>capture coordination among key authors. </a:t>
+          </a:r>
+          <a:endParaRPr lang="en-US" sz="1800" kern="1200" dirty="0"/>
         </a:p>
       </dsp:txBody>
       <dsp:txXfrm>
@@ -2044,7 +1860,7 @@
         </a:bodyPr>
         <a:lstStyle/>
         <a:p>
-          <a:pPr marL="0" lvl="0" indent="0" algn="l" defTabSz="1022350">
+          <a:pPr marL="0" lvl="0" indent="0" algn="l" defTabSz="800100" rtl="0">
             <a:lnSpc>
               <a:spcPct val="90000"/>
             </a:lnSpc>
@@ -2057,18 +1873,36 @@
             <a:buNone/>
           </a:pPr>
           <a:r>
-            <a:rPr lang="en-GB" sz="2300" kern="1200" dirty="0"/>
-            <a:t>Thus, enables the computation of </a:t>
+            <a:rPr lang="en-GB" sz="1800" kern="1200" dirty="0"/>
+            <a:t>Goal:</a:t>
+          </a:r>
+        </a:p>
+        <a:p>
+          <a:pPr marL="0" lvl="0" indent="0" algn="l" defTabSz="800100" rtl="0">
+            <a:lnSpc>
+              <a:spcPct val="90000"/>
+            </a:lnSpc>
+            <a:spcBef>
+              <a:spcPct val="0"/>
+            </a:spcBef>
+            <a:spcAft>
+              <a:spcPct val="35000"/>
+            </a:spcAft>
+            <a:buNone/>
+          </a:pPr>
+          <a:r>
+            <a:rPr lang="en-GB" sz="1800" kern="1200" dirty="0"/>
+            <a:t>Computation of </a:t>
           </a:r>
           <a:r>
-            <a:rPr lang="en-GB" sz="2300" b="1" kern="1200" dirty="0"/>
+            <a:rPr lang="en-GB" sz="1800" b="1" kern="1200" dirty="0"/>
             <a:t>graph-based indicators </a:t>
           </a:r>
           <a:r>
-            <a:rPr lang="en-GB" sz="2300" kern="1200" dirty="0"/>
+            <a:rPr lang="en-GB" sz="1800" kern="1200" dirty="0"/>
             <a:t>(e.g., centralities) to identify information operation drivers.</a:t>
           </a:r>
-          <a:endParaRPr lang="en-US" sz="2300" kern="1200" dirty="0"/>
+          <a:endParaRPr lang="en-US" sz="1800" kern="1200" dirty="0"/>
         </a:p>
       </dsp:txBody>
       <dsp:txXfrm>
@@ -3756,6 +3590,271 @@
     </a:lvl9pPr>
   </p:notesStyle>
 </p:notesMaster>
+</file>
+
+<file path=ppt/notesSlides/notesSlide1.xml><?xml version="1.0" encoding="utf-8"?>
+<p:notes xmlns:a="http://schemas.openxmlformats.org/drawingml/2006/main" xmlns:r="http://schemas.openxmlformats.org/officeDocument/2006/relationships" xmlns:p="http://schemas.openxmlformats.org/presentationml/2006/main">
+  <p:cSld>
+    <p:spTree>
+      <p:nvGrpSpPr>
+        <p:cNvPr id="1" name=""/>
+        <p:cNvGrpSpPr/>
+        <p:nvPr/>
+      </p:nvGrpSpPr>
+      <p:grpSpPr>
+        <a:xfrm>
+          <a:off x="0" y="0"/>
+          <a:ext cx="0" cy="0"/>
+          <a:chOff x="0" y="0"/>
+          <a:chExt cx="0" cy="0"/>
+        </a:xfrm>
+      </p:grpSpPr>
+      <p:sp>
+        <p:nvSpPr>
+          <p:cNvPr id="2" name="Slide Image Placeholder 1"/>
+          <p:cNvSpPr>
+            <a:spLocks noGrp="1" noRot="1" noChangeAspect="1"/>
+          </p:cNvSpPr>
+          <p:nvPr>
+            <p:ph type="sldImg"/>
+          </p:nvPr>
+        </p:nvSpPr>
+        <p:spPr/>
+        <p:txBody>
+          <a:bodyPr/>
+          <a:lstStyle/>
+          <a:p>
+            <a:endParaRPr lang="en-IL"/>
+          </a:p>
+        </p:txBody>
+      </p:sp>
+      <p:sp>
+        <p:nvSpPr>
+          <p:cNvPr id="3" name="Notes Placeholder 2"/>
+          <p:cNvSpPr>
+            <a:spLocks noGrp="1"/>
+          </p:cNvSpPr>
+          <p:nvPr>
+            <p:ph type="body" idx="1"/>
+          </p:nvPr>
+        </p:nvSpPr>
+        <p:spPr/>
+        <p:txBody>
+          <a:bodyPr/>
+          <a:lstStyle/>
+          <a:p>
+            <a:r>
+              <a:rPr lang="en-IL" dirty="0"/>
+              <a:t>[1] </a:t>
+            </a:r>
+            <a:r>
+              <a:rPr lang="en-US" sz="1200" b="0" i="0" kern="1200" dirty="0" err="1">
+                <a:solidFill>
+                  <a:schemeClr val="tx1"/>
+                </a:solidFill>
+                <a:effectLst/>
+                <a:latin typeface="+mn-lt"/>
+                <a:ea typeface="+mn-ea"/>
+                <a:cs typeface="+mn-cs"/>
+              </a:rPr>
+              <a:t>Seckin</a:t>
+            </a:r>
+            <a:r>
+              <a:rPr lang="en-US" sz="1200" b="0" i="0" kern="1200" dirty="0">
+                <a:solidFill>
+                  <a:schemeClr val="tx1"/>
+                </a:solidFill>
+                <a:effectLst/>
+                <a:latin typeface="+mn-lt"/>
+                <a:ea typeface="+mn-ea"/>
+                <a:cs typeface="+mn-cs"/>
+              </a:rPr>
+              <a:t>, O. C., Pote, M., </a:t>
+            </a:r>
+            <a:r>
+              <a:rPr lang="en-US" sz="1200" b="0" i="0" kern="1200" dirty="0" err="1">
+                <a:solidFill>
+                  <a:schemeClr val="tx1"/>
+                </a:solidFill>
+                <a:effectLst/>
+                <a:latin typeface="+mn-lt"/>
+                <a:ea typeface="+mn-ea"/>
+                <a:cs typeface="+mn-cs"/>
+              </a:rPr>
+              <a:t>Nwala</a:t>
+            </a:r>
+            <a:r>
+              <a:rPr lang="en-US" sz="1200" b="0" i="0" kern="1200" dirty="0">
+                <a:solidFill>
+                  <a:schemeClr val="tx1"/>
+                </a:solidFill>
+                <a:effectLst/>
+                <a:latin typeface="+mn-lt"/>
+                <a:ea typeface="+mn-ea"/>
+                <a:cs typeface="+mn-cs"/>
+              </a:rPr>
+              <a:t>, A. C., Yin, L., </a:t>
+            </a:r>
+            <a:r>
+              <a:rPr lang="en-US" sz="1200" b="0" i="0" kern="1200" dirty="0" err="1">
+                <a:solidFill>
+                  <a:schemeClr val="tx1"/>
+                </a:solidFill>
+                <a:effectLst/>
+                <a:latin typeface="+mn-lt"/>
+                <a:ea typeface="+mn-ea"/>
+                <a:cs typeface="+mn-cs"/>
+              </a:rPr>
+              <a:t>Luceri</a:t>
+            </a:r>
+            <a:r>
+              <a:rPr lang="en-US" sz="1200" b="0" i="0" kern="1200" dirty="0">
+                <a:solidFill>
+                  <a:schemeClr val="tx1"/>
+                </a:solidFill>
+                <a:effectLst/>
+                <a:latin typeface="+mn-lt"/>
+                <a:ea typeface="+mn-ea"/>
+                <a:cs typeface="+mn-cs"/>
+              </a:rPr>
+              <a:t>, L., Flammini, A., &amp; Menczer, F. (2025, June). Labeled datasets for research on information operations. In </a:t>
+            </a:r>
+            <a:r>
+              <a:rPr lang="en-US" sz="1200" b="0" i="1" kern="1200" dirty="0">
+                <a:solidFill>
+                  <a:schemeClr val="tx1"/>
+                </a:solidFill>
+                <a:effectLst/>
+                <a:latin typeface="+mn-lt"/>
+                <a:ea typeface="+mn-ea"/>
+                <a:cs typeface="+mn-cs"/>
+              </a:rPr>
+              <a:t>Proceedings of the International AAAI Conference on Web and Social Media</a:t>
+            </a:r>
+            <a:r>
+              <a:rPr lang="en-US" sz="1200" b="0" i="0" kern="1200" dirty="0">
+                <a:solidFill>
+                  <a:schemeClr val="tx1"/>
+                </a:solidFill>
+                <a:effectLst/>
+                <a:latin typeface="+mn-lt"/>
+                <a:ea typeface="+mn-ea"/>
+                <a:cs typeface="+mn-cs"/>
+              </a:rPr>
+              <a:t> (Vol. 19, pp. 2567-2574).</a:t>
+            </a:r>
+          </a:p>
+          <a:p>
+            <a:r>
+              <a:rPr lang="en-US" sz="1200" b="0" i="0" kern="1200" dirty="0">
+                <a:solidFill>
+                  <a:schemeClr val="tx1"/>
+                </a:solidFill>
+                <a:effectLst/>
+                <a:latin typeface="+mn-lt"/>
+                <a:ea typeface="+mn-ea"/>
+                <a:cs typeface="+mn-cs"/>
+              </a:rPr>
+              <a:t>[2] Balasubramanian, A., Zou, V., Narayana, H., You, C., </a:t>
+            </a:r>
+            <a:r>
+              <a:rPr lang="en-US" sz="1200" b="0" i="0" kern="1200" dirty="0" err="1">
+                <a:solidFill>
+                  <a:schemeClr val="tx1"/>
+                </a:solidFill>
+                <a:effectLst/>
+                <a:latin typeface="+mn-lt"/>
+                <a:ea typeface="+mn-ea"/>
+                <a:cs typeface="+mn-cs"/>
+              </a:rPr>
+              <a:t>Luceri</a:t>
+            </a:r>
+            <a:r>
+              <a:rPr lang="en-US" sz="1200" b="0" i="0" kern="1200" dirty="0">
+                <a:solidFill>
+                  <a:schemeClr val="tx1"/>
+                </a:solidFill>
+                <a:effectLst/>
+                <a:latin typeface="+mn-lt"/>
+                <a:ea typeface="+mn-ea"/>
+                <a:cs typeface="+mn-cs"/>
+              </a:rPr>
+              <a:t>, L., &amp; Ferrara, E. (2024). A public dataset tracking social media discourse about the 2024 us presidential election on twitter/x. </a:t>
+            </a:r>
+            <a:r>
+              <a:rPr lang="en-US" sz="1200" b="0" i="1" kern="1200" dirty="0" err="1">
+                <a:solidFill>
+                  <a:schemeClr val="tx1"/>
+                </a:solidFill>
+                <a:effectLst/>
+                <a:latin typeface="+mn-lt"/>
+                <a:ea typeface="+mn-ea"/>
+                <a:cs typeface="+mn-cs"/>
+              </a:rPr>
+              <a:t>arXiv</a:t>
+            </a:r>
+            <a:r>
+              <a:rPr lang="en-US" sz="1200" b="0" i="1" kern="1200" dirty="0">
+                <a:solidFill>
+                  <a:schemeClr val="tx1"/>
+                </a:solidFill>
+                <a:effectLst/>
+                <a:latin typeface="+mn-lt"/>
+                <a:ea typeface="+mn-ea"/>
+                <a:cs typeface="+mn-cs"/>
+              </a:rPr>
+              <a:t> preprint arXiv:2411.00376</a:t>
+            </a:r>
+            <a:r>
+              <a:rPr lang="en-US" sz="1200" b="0" i="0" kern="1200" dirty="0">
+                <a:solidFill>
+                  <a:schemeClr val="tx1"/>
+                </a:solidFill>
+                <a:effectLst/>
+                <a:latin typeface="+mn-lt"/>
+                <a:ea typeface="+mn-ea"/>
+                <a:cs typeface="+mn-cs"/>
+              </a:rPr>
+              <a:t>.</a:t>
+            </a:r>
+            <a:endParaRPr lang="en-IL" dirty="0"/>
+          </a:p>
+        </p:txBody>
+      </p:sp>
+      <p:sp>
+        <p:nvSpPr>
+          <p:cNvPr id="4" name="Slide Number Placeholder 3"/>
+          <p:cNvSpPr>
+            <a:spLocks noGrp="1"/>
+          </p:cNvSpPr>
+          <p:nvPr>
+            <p:ph type="sldNum" sz="quarter" idx="5"/>
+          </p:nvPr>
+        </p:nvSpPr>
+        <p:spPr/>
+        <p:txBody>
+          <a:bodyPr/>
+          <a:lstStyle/>
+          <a:p>
+            <a:fld id="{7F6CD5E7-A5BE-4430-AD67-E129D63AAC5C}" type="slidenum">
+              <a:rPr lang="he-IL" smtClean="0"/>
+              <a:t>4</a:t>
+            </a:fld>
+            <a:endParaRPr lang="he-IL"/>
+          </a:p>
+        </p:txBody>
+      </p:sp>
+    </p:spTree>
+    <p:extLst>
+      <p:ext uri="{BB962C8B-B14F-4D97-AF65-F5344CB8AC3E}">
+        <p14:creationId xmlns:p14="http://schemas.microsoft.com/office/powerpoint/2010/main" val="4212091859"/>
+      </p:ext>
+    </p:extLst>
+  </p:cSld>
+  <p:clrMapOvr>
+    <a:masterClrMapping/>
+  </p:clrMapOvr>
+</p:notes>
 </file>
 
 <file path=ppt/slideLayouts/slideLayout1.xml><?xml version="1.0" encoding="utf-8"?>
@@ -8334,7 +8433,7 @@
             <p:ph idx="1"/>
             <p:extLst>
               <p:ext uri="{D42A27DB-BD31-4B8C-83A1-F6EECF244321}">
-                <p14:modId xmlns:p14="http://schemas.microsoft.com/office/powerpoint/2010/main" val="91776922"/>
+                <p14:modId xmlns:p14="http://schemas.microsoft.com/office/powerpoint/2010/main" val="1780567369"/>
               </p:ext>
             </p:extLst>
           </p:nvPr>
@@ -8537,6 +8636,105 @@
           </a:p>
         </p:txBody>
       </p:sp>
+      <p:sp>
+        <p:nvSpPr>
+          <p:cNvPr id="2" name="Rectangle: Rounded Corners 1">
+            <a:extLst>
+              <a:ext uri="{FF2B5EF4-FFF2-40B4-BE49-F238E27FC236}">
+                <a16:creationId xmlns:a16="http://schemas.microsoft.com/office/drawing/2014/main" id="{C505B61D-A950-64DC-3926-373E9764601E}"/>
+              </a:ext>
+            </a:extLst>
+          </p:cNvPr>
+          <p:cNvSpPr/>
+          <p:nvPr/>
+        </p:nvSpPr>
+        <p:spPr>
+          <a:xfrm>
+            <a:off x="9861177" y="2519082"/>
+            <a:ext cx="1936376" cy="627530"/>
+          </a:xfrm>
+          <a:prstGeom prst="roundRect">
+            <a:avLst/>
+          </a:prstGeom>
+          <a:ln w="19050"/>
+        </p:spPr>
+        <p:style>
+          <a:lnRef idx="2">
+            <a:schemeClr val="dk1"/>
+          </a:lnRef>
+          <a:fillRef idx="1">
+            <a:schemeClr val="lt1"/>
+          </a:fillRef>
+          <a:effectRef idx="0">
+            <a:schemeClr val="dk1"/>
+          </a:effectRef>
+          <a:fontRef idx="minor">
+            <a:schemeClr val="dk1"/>
+          </a:fontRef>
+        </p:style>
+        <p:txBody>
+          <a:bodyPr rtlCol="0" anchor="ctr"/>
+          <a:lstStyle/>
+          <a:p>
+            <a:pPr algn="ctr"/>
+            <a:r>
+              <a:rPr lang="en-US" dirty="0"/>
+              <a:t>4) Entities Scoring</a:t>
+            </a:r>
+            <a:endParaRPr lang="en-IL" dirty="0"/>
+          </a:p>
+        </p:txBody>
+      </p:sp>
+      <p:sp>
+        <p:nvSpPr>
+          <p:cNvPr id="3" name="Rectangle: Rounded Corners 2">
+            <a:extLst>
+              <a:ext uri="{FF2B5EF4-FFF2-40B4-BE49-F238E27FC236}">
+                <a16:creationId xmlns:a16="http://schemas.microsoft.com/office/drawing/2014/main" id="{7A45EB10-99E3-FC59-0C3A-958B459F6D25}"/>
+              </a:ext>
+            </a:extLst>
+          </p:cNvPr>
+          <p:cNvSpPr/>
+          <p:nvPr/>
+        </p:nvSpPr>
+        <p:spPr>
+          <a:xfrm>
+            <a:off x="5517050" y="3429000"/>
+            <a:ext cx="1157900" cy="211577"/>
+          </a:xfrm>
+          <a:prstGeom prst="roundRect">
+            <a:avLst/>
+          </a:prstGeom>
+        </p:spPr>
+        <p:style>
+          <a:lnRef idx="2">
+            <a:schemeClr val="accent1">
+              <a:shade val="15000"/>
+            </a:schemeClr>
+          </a:lnRef>
+          <a:fillRef idx="1">
+            <a:schemeClr val="accent1"/>
+          </a:fillRef>
+          <a:effectRef idx="0">
+            <a:schemeClr val="accent1"/>
+          </a:effectRef>
+          <a:fontRef idx="minor">
+            <a:schemeClr val="lt1"/>
+          </a:fontRef>
+        </p:style>
+        <p:txBody>
+          <a:bodyPr rtlCol="0" anchor="ctr"/>
+          <a:lstStyle/>
+          <a:p>
+            <a:pPr algn="ctr"/>
+            <a:r>
+              <a:rPr lang="en-US" sz="1400" dirty="0"/>
+              <a:t>Aggregation</a:t>
+            </a:r>
+            <a:endParaRPr lang="en-IL" sz="1400" dirty="0"/>
+          </a:p>
+        </p:txBody>
+      </p:sp>
     </p:spTree>
     <p:extLst>
       <p:ext uri="{BB962C8B-B14F-4D97-AF65-F5344CB8AC3E}">
@@ -8572,6 +8770,555 @@
           <p:cNvPr id="2" name="Title 1">
             <a:extLst>
               <a:ext uri="{FF2B5EF4-FFF2-40B4-BE49-F238E27FC236}">
+                <a16:creationId xmlns:a16="http://schemas.microsoft.com/office/drawing/2014/main" id="{81A51D72-4134-AB7E-1B0A-64CFD080E3B4}"/>
+              </a:ext>
+            </a:extLst>
+          </p:cNvPr>
+          <p:cNvSpPr>
+            <a:spLocks noGrp="1"/>
+          </p:cNvSpPr>
+          <p:nvPr>
+            <p:ph type="title"/>
+          </p:nvPr>
+        </p:nvSpPr>
+        <p:spPr>
+          <a:xfrm>
+            <a:off x="3075590" y="398183"/>
+            <a:ext cx="8753475" cy="1325563"/>
+          </a:xfrm>
+        </p:spPr>
+        <p:txBody>
+          <a:bodyPr>
+            <a:normAutofit/>
+          </a:bodyPr>
+          <a:lstStyle/>
+          <a:p>
+            <a:r>
+              <a:rPr lang="en-US" dirty="0"/>
+              <a:t>Datasets</a:t>
+            </a:r>
+          </a:p>
+        </p:txBody>
+      </p:sp>
+      <p:sp>
+        <p:nvSpPr>
+          <p:cNvPr id="4" name="Slide Number Placeholder 3">
+            <a:extLst>
+              <a:ext uri="{FF2B5EF4-FFF2-40B4-BE49-F238E27FC236}">
+                <a16:creationId xmlns:a16="http://schemas.microsoft.com/office/drawing/2014/main" id="{68544F5D-1213-B7D4-11B6-681FD5C86403}"/>
+              </a:ext>
+            </a:extLst>
+          </p:cNvPr>
+          <p:cNvSpPr>
+            <a:spLocks noGrp="1"/>
+          </p:cNvSpPr>
+          <p:nvPr>
+            <p:ph type="sldNum" sz="quarter" idx="12"/>
+          </p:nvPr>
+        </p:nvSpPr>
+        <p:spPr/>
+        <p:txBody>
+          <a:bodyPr/>
+          <a:lstStyle/>
+          <a:p>
+            <a:fld id="{E6AB8EDD-9EF2-4633-A1C2-4D908C1019B4}" type="slidenum">
+              <a:rPr lang="he-IL" smtClean="0"/>
+              <a:t>4</a:t>
+            </a:fld>
+            <a:endParaRPr lang="he-IL"/>
+          </a:p>
+        </p:txBody>
+      </p:sp>
+      <p:graphicFrame>
+        <p:nvGraphicFramePr>
+          <p:cNvPr id="6" name="Table 5">
+            <a:extLst>
+              <a:ext uri="{FF2B5EF4-FFF2-40B4-BE49-F238E27FC236}">
+                <a16:creationId xmlns:a16="http://schemas.microsoft.com/office/drawing/2014/main" id="{9DCB54C2-7A31-3765-2BD6-58614883BFB8}"/>
+              </a:ext>
+            </a:extLst>
+          </p:cNvPr>
+          <p:cNvGraphicFramePr>
+            <a:graphicFrameLocks noGrp="1"/>
+          </p:cNvGraphicFramePr>
+          <p:nvPr>
+            <p:extLst>
+              <p:ext uri="{D42A27DB-BD31-4B8C-83A1-F6EECF244321}">
+                <p14:modId xmlns:p14="http://schemas.microsoft.com/office/powerpoint/2010/main" val="2588244266"/>
+              </p:ext>
+            </p:extLst>
+          </p:nvPr>
+        </p:nvGraphicFramePr>
+        <p:xfrm>
+          <a:off x="1538615" y="1612234"/>
+          <a:ext cx="10601378" cy="5394960"/>
+        </p:xfrm>
+        <a:graphic>
+          <a:graphicData uri="http://schemas.openxmlformats.org/drawingml/2006/table">
+            <a:tbl>
+              <a:tblPr>
+                <a:tableStyleId>{5C22544A-7EE6-4342-B048-85BDC9FD1C3A}</a:tableStyleId>
+              </a:tblPr>
+              <a:tblGrid>
+                <a:gridCol w="5300689">
+                  <a:extLst>
+                    <a:ext uri="{9D8B030D-6E8A-4147-A177-3AD203B41FA5}">
+                      <a16:colId xmlns:a16="http://schemas.microsoft.com/office/drawing/2014/main" val="2664862571"/>
+                    </a:ext>
+                  </a:extLst>
+                </a:gridCol>
+                <a:gridCol w="5300689">
+                  <a:extLst>
+                    <a:ext uri="{9D8B030D-6E8A-4147-A177-3AD203B41FA5}">
+                      <a16:colId xmlns:a16="http://schemas.microsoft.com/office/drawing/2014/main" val="2429324490"/>
+                    </a:ext>
+                  </a:extLst>
+                </a:gridCol>
+              </a:tblGrid>
+              <a:tr h="370840">
+                <a:tc>
+                  <a:txBody>
+                    <a:bodyPr/>
+                    <a:lstStyle/>
+                    <a:p>
+                      <a:pPr marL="0" marR="0" lvl="0" indent="0" algn="l" defTabSz="914400" rtl="0" eaLnBrk="1" fontAlgn="auto" latinLnBrk="0" hangingPunct="1">
+                        <a:lnSpc>
+                          <a:spcPct val="100000"/>
+                        </a:lnSpc>
+                        <a:spcBef>
+                          <a:spcPts val="0"/>
+                        </a:spcBef>
+                        <a:spcAft>
+                          <a:spcPts val="0"/>
+                        </a:spcAft>
+                        <a:buClrTx/>
+                        <a:buSzTx/>
+                        <a:buFontTx/>
+                        <a:buNone/>
+                        <a:tabLst/>
+                        <a:defRPr/>
+                      </a:pPr>
+                      <a:r>
+                        <a:rPr lang="en-IL" sz="2400" b="0" dirty="0">
+                          <a:solidFill>
+                            <a:schemeClr val="tx1"/>
+                          </a:solidFill>
+                        </a:rPr>
+                        <a:t> </a:t>
+                      </a:r>
+                      <a:r>
+                        <a:rPr lang="en-GB" sz="2400" b="0" kern="1200" dirty="0">
+                          <a:solidFill>
+                            <a:schemeClr val="tx1"/>
+                          </a:solidFill>
+                          <a:latin typeface="+mn-lt"/>
+                          <a:ea typeface="+mn-ea"/>
+                          <a:cs typeface="+mn-cs"/>
+                        </a:rPr>
+                        <a:t>Labeled </a:t>
+                      </a:r>
+                      <a:r>
+                        <a:rPr lang="en-US" sz="2400" b="0" kern="1200" dirty="0">
+                          <a:solidFill>
+                            <a:schemeClr val="tx1"/>
+                          </a:solidFill>
+                          <a:latin typeface="+mn-lt"/>
+                          <a:ea typeface="+mn-ea"/>
+                          <a:cs typeface="+mn-cs"/>
+                        </a:rPr>
+                        <a:t>IO Corpus [1]</a:t>
+                      </a:r>
+                    </a:p>
+                    <a:p>
+                      <a:endParaRPr lang="en-US" b="0" dirty="0">
+                        <a:solidFill>
+                          <a:schemeClr val="tx1"/>
+                        </a:solidFill>
+                      </a:endParaRPr>
+                    </a:p>
+                    <a:p>
+                      <a:pPr marL="285750" indent="-285750">
+                        <a:lnSpc>
+                          <a:spcPct val="150000"/>
+                        </a:lnSpc>
+                        <a:buFont typeface="Arial" panose="020B0604020202020204" pitchFamily="34" charset="0"/>
+                        <a:buChar char="•"/>
+                      </a:pPr>
+                      <a:r>
+                        <a:rPr lang="en-US" b="0" dirty="0">
+                          <a:solidFill>
+                            <a:schemeClr val="tx1"/>
+                          </a:solidFill>
+                        </a:rPr>
+                        <a:t>Curated collection of 26 Information Operation (IO) campaigns.</a:t>
+                      </a:r>
+                    </a:p>
+                    <a:p>
+                      <a:pPr marL="285750" indent="-285750">
+                        <a:lnSpc>
+                          <a:spcPct val="150000"/>
+                        </a:lnSpc>
+                        <a:buFont typeface="Arial" panose="020B0604020202020204" pitchFamily="34" charset="0"/>
+                        <a:buChar char="•"/>
+                      </a:pPr>
+                      <a:r>
+                        <a:rPr lang="en-US" b="0" dirty="0">
+                          <a:solidFill>
+                            <a:schemeClr val="tx1"/>
+                          </a:solidFill>
+                        </a:rPr>
+                        <a:t>Each campaign fully labeled (IO vs. Control accounts).</a:t>
+                      </a:r>
+                    </a:p>
+                    <a:p>
+                      <a:pPr marL="285750" indent="-285750">
+                        <a:lnSpc>
+                          <a:spcPct val="150000"/>
+                        </a:lnSpc>
+                        <a:buFont typeface="Arial" panose="020B0604020202020204" pitchFamily="34" charset="0"/>
+                        <a:buChar char="•"/>
+                      </a:pPr>
+                      <a:r>
+                        <a:rPr lang="en-US" b="0" dirty="0">
+                          <a:solidFill>
+                            <a:schemeClr val="tx1"/>
+                          </a:solidFill>
+                          <a:hlinkClick r:id="rId3"/>
+                        </a:rPr>
+                        <a:t>https://zenodo.org/records/14189193</a:t>
+                      </a:r>
+                      <a:endParaRPr lang="en-US" b="0" dirty="0">
+                        <a:solidFill>
+                          <a:schemeClr val="tx1"/>
+                        </a:solidFill>
+                      </a:endParaRPr>
+                    </a:p>
+                    <a:p>
+                      <a:pPr>
+                        <a:lnSpc>
+                          <a:spcPct val="150000"/>
+                        </a:lnSpc>
+                      </a:pPr>
+                      <a:r>
+                        <a:rPr lang="en-US" b="1" u="sng" dirty="0">
+                          <a:solidFill>
+                            <a:schemeClr val="tx1"/>
+                          </a:solidFill>
+                        </a:rPr>
+                        <a:t>Ecuador Campaign Subset</a:t>
+                      </a:r>
+                    </a:p>
+                    <a:p>
+                      <a:pPr marL="342900" indent="-342900">
+                        <a:lnSpc>
+                          <a:spcPct val="150000"/>
+                        </a:lnSpc>
+                        <a:buFont typeface="+mj-lt"/>
+                        <a:buAutoNum type="arabicPeriod"/>
+                      </a:pPr>
+                      <a:r>
+                        <a:rPr lang="en-US" b="0" dirty="0">
+                          <a:solidFill>
+                            <a:schemeClr val="tx1"/>
+                          </a:solidFill>
+                        </a:rPr>
+                        <a:t>787 IO accounts | 21,138 Control accounts</a:t>
+                      </a:r>
+                    </a:p>
+                    <a:p>
+                      <a:pPr marL="342900" indent="-342900">
+                        <a:lnSpc>
+                          <a:spcPct val="150000"/>
+                        </a:lnSpc>
+                        <a:buFont typeface="+mj-lt"/>
+                        <a:buAutoNum type="arabicPeriod"/>
+                      </a:pPr>
+                      <a:r>
+                        <a:rPr lang="en-US" b="0" dirty="0">
+                          <a:solidFill>
+                            <a:schemeClr val="tx1"/>
+                          </a:solidFill>
+                        </a:rPr>
+                        <a:t>700K IO tweets | 770K Control tweets</a:t>
+                      </a:r>
+                    </a:p>
+                    <a:p>
+                      <a:endParaRPr lang="en-IL" b="0" dirty="0">
+                        <a:solidFill>
+                          <a:schemeClr val="tx1"/>
+                        </a:solidFill>
+                      </a:endParaRPr>
+                    </a:p>
+                  </a:txBody>
+                  <a:tcPr>
+                    <a:lnL w="12700" cmpd="sng">
+                      <a:noFill/>
+                    </a:lnL>
+                    <a:lnR w="12700" cmpd="sng">
+                      <a:noFill/>
+                    </a:lnR>
+                    <a:lnT w="12700" cmpd="sng">
+                      <a:noFill/>
+                    </a:lnT>
+                    <a:lnB w="38100" cmpd="sng">
+                      <a:noFill/>
+                    </a:lnB>
+                    <a:lnTlToBr w="12700" cmpd="sng">
+                      <a:noFill/>
+                      <a:prstDash val="solid"/>
+                    </a:lnTlToBr>
+                    <a:lnBlToTr w="12700" cmpd="sng">
+                      <a:noFill/>
+                      <a:prstDash val="solid"/>
+                    </a:lnBlToTr>
+                    <a:noFill/>
+                  </a:tcPr>
+                </a:tc>
+                <a:tc>
+                  <a:txBody>
+                    <a:bodyPr/>
+                    <a:lstStyle/>
+                    <a:p>
+                      <a:pPr marL="0" indent="0">
+                        <a:buNone/>
+                      </a:pPr>
+                      <a:r>
+                        <a:rPr lang="en-US" sz="2400" b="0" dirty="0">
+                          <a:solidFill>
+                            <a:schemeClr val="tx1"/>
+                          </a:solidFill>
+                        </a:rPr>
+                        <a:t>US 2024 Election Dataset[2]</a:t>
+                      </a:r>
+                    </a:p>
+                    <a:p>
+                      <a:pPr marL="0" indent="0">
+                        <a:buNone/>
+                      </a:pPr>
+                      <a:endParaRPr lang="en-US" b="0" dirty="0">
+                        <a:solidFill>
+                          <a:schemeClr val="tx1"/>
+                        </a:solidFill>
+                      </a:endParaRPr>
+                    </a:p>
+                    <a:p>
+                      <a:pPr marL="285750" indent="-285750">
+                        <a:lnSpc>
+                          <a:spcPct val="150000"/>
+                        </a:lnSpc>
+                        <a:buFont typeface="Arial" panose="020B0604020202020204" pitchFamily="34" charset="0"/>
+                        <a:buChar char="•"/>
+                      </a:pPr>
+                      <a:r>
+                        <a:rPr lang="en-US" b="0" dirty="0">
+                          <a:solidFill>
+                            <a:schemeClr val="tx1"/>
+                          </a:solidFill>
+                        </a:rPr>
+                        <a:t>Clean dataset with corrupted/problematic rows removed</a:t>
+                      </a:r>
+                    </a:p>
+                    <a:p>
+                      <a:pPr marL="285750" indent="-285750">
+                        <a:lnSpc>
+                          <a:spcPct val="150000"/>
+                        </a:lnSpc>
+                        <a:buFont typeface="Arial" panose="020B0604020202020204" pitchFamily="34" charset="0"/>
+                        <a:buChar char="•"/>
+                      </a:pPr>
+                      <a:r>
+                        <a:rPr lang="en-US" b="0" dirty="0">
+                          <a:solidFill>
+                            <a:schemeClr val="tx1"/>
+                          </a:solidFill>
+                        </a:rPr>
+                        <a:t>42,211,159 tweets | January 1 – December 31, 2024</a:t>
+                      </a:r>
+                    </a:p>
+                    <a:p>
+                      <a:pPr>
+                        <a:lnSpc>
+                          <a:spcPct val="150000"/>
+                        </a:lnSpc>
+                      </a:pPr>
+                      <a:r>
+                        <a:rPr lang="en-US" b="0" u="sng" dirty="0">
+                          <a:solidFill>
+                            <a:schemeClr val="tx1"/>
+                          </a:solidFill>
+                        </a:rPr>
+                        <a:t>Key Timeline Events</a:t>
+                      </a:r>
+                    </a:p>
+                    <a:p>
+                      <a:pPr marL="342900" indent="-342900">
+                        <a:lnSpc>
+                          <a:spcPct val="150000"/>
+                        </a:lnSpc>
+                        <a:buFont typeface="+mj-lt"/>
+                        <a:buAutoNum type="arabicPeriod"/>
+                      </a:pPr>
+                      <a:r>
+                        <a:rPr lang="en-US" b="0" dirty="0">
+                          <a:solidFill>
+                            <a:schemeClr val="tx1"/>
+                          </a:solidFill>
+                        </a:rPr>
+                        <a:t>Jul 13 – Attempted assassination of Donald Trump</a:t>
+                      </a:r>
+                    </a:p>
+                    <a:p>
+                      <a:pPr marL="342900" indent="-342900">
+                        <a:lnSpc>
+                          <a:spcPct val="150000"/>
+                        </a:lnSpc>
+                        <a:buFont typeface="+mj-lt"/>
+                        <a:buAutoNum type="arabicPeriod"/>
+                      </a:pPr>
+                      <a:r>
+                        <a:rPr lang="en-US" b="0" dirty="0">
+                          <a:solidFill>
+                            <a:schemeClr val="tx1"/>
+                          </a:solidFill>
+                        </a:rPr>
+                        <a:t>Jul 21 – Joe Biden withdrew from presidential race</a:t>
+                      </a:r>
+                    </a:p>
+                    <a:p>
+                      <a:pPr marL="342900" indent="-342900">
+                        <a:lnSpc>
+                          <a:spcPct val="150000"/>
+                        </a:lnSpc>
+                        <a:buFont typeface="+mj-lt"/>
+                        <a:buAutoNum type="arabicPeriod"/>
+                      </a:pPr>
+                      <a:r>
+                        <a:rPr lang="en-US" b="0" dirty="0">
+                          <a:solidFill>
+                            <a:schemeClr val="tx1"/>
+                          </a:solidFill>
+                        </a:rPr>
+                        <a:t>Aug 5 – Kamala Harris formally nominated</a:t>
+                      </a:r>
+                    </a:p>
+                    <a:p>
+                      <a:pPr marL="342900" indent="-342900">
+                        <a:lnSpc>
+                          <a:spcPct val="150000"/>
+                        </a:lnSpc>
+                        <a:buFont typeface="+mj-lt"/>
+                        <a:buAutoNum type="arabicPeriod"/>
+                      </a:pPr>
+                      <a:r>
+                        <a:rPr lang="en-US" b="0" dirty="0">
+                          <a:solidFill>
+                            <a:schemeClr val="tx1"/>
+                          </a:solidFill>
+                        </a:rPr>
+                        <a:t>Nov 5 – Election Day</a:t>
+                      </a:r>
+                    </a:p>
+                    <a:p>
+                      <a:pPr marL="342900" indent="-342900">
+                        <a:lnSpc>
+                          <a:spcPct val="150000"/>
+                        </a:lnSpc>
+                        <a:buFont typeface="+mj-lt"/>
+                        <a:buAutoNum type="arabicPeriod"/>
+                      </a:pPr>
+                      <a:r>
+                        <a:rPr lang="en-US" b="0" dirty="0">
+                          <a:solidFill>
+                            <a:schemeClr val="tx1"/>
+                          </a:solidFill>
+                        </a:rPr>
+                        <a:t>Nov 6 – Election results announced</a:t>
+                      </a:r>
+                    </a:p>
+                    <a:p>
+                      <a:endParaRPr lang="en-IL" b="0" dirty="0">
+                        <a:solidFill>
+                          <a:schemeClr val="tx1"/>
+                        </a:solidFill>
+                      </a:endParaRPr>
+                    </a:p>
+                    <a:p>
+                      <a:endParaRPr lang="en-IL" b="0" dirty="0">
+                        <a:solidFill>
+                          <a:schemeClr val="tx1"/>
+                        </a:solidFill>
+                      </a:endParaRPr>
+                    </a:p>
+                  </a:txBody>
+                  <a:tcPr>
+                    <a:lnL w="12700" cmpd="sng">
+                      <a:noFill/>
+                    </a:lnL>
+                    <a:lnR w="12700" cmpd="sng">
+                      <a:noFill/>
+                    </a:lnR>
+                    <a:lnT w="12700" cmpd="sng">
+                      <a:noFill/>
+                    </a:lnT>
+                    <a:lnB w="38100" cmpd="sng">
+                      <a:noFill/>
+                    </a:lnB>
+                    <a:lnTlToBr w="12700" cmpd="sng">
+                      <a:noFill/>
+                      <a:prstDash val="solid"/>
+                    </a:lnTlToBr>
+                    <a:lnBlToTr w="12700" cmpd="sng">
+                      <a:noFill/>
+                      <a:prstDash val="solid"/>
+                    </a:lnBlToTr>
+                    <a:noFill/>
+                  </a:tcPr>
+                </a:tc>
+                <a:extLst>
+                  <a:ext uri="{0D108BD9-81ED-4DB2-BD59-A6C34878D82A}">
+                    <a16:rowId xmlns:a16="http://schemas.microsoft.com/office/drawing/2014/main" val="3423987257"/>
+                  </a:ext>
+                </a:extLst>
+              </a:tr>
+            </a:tbl>
+          </a:graphicData>
+        </a:graphic>
+      </p:graphicFrame>
+    </p:spTree>
+    <p:extLst>
+      <p:ext uri="{BB962C8B-B14F-4D97-AF65-F5344CB8AC3E}">
+        <p14:creationId xmlns:p14="http://schemas.microsoft.com/office/powerpoint/2010/main" val="2485155752"/>
+      </p:ext>
+    </p:extLst>
+  </p:cSld>
+  <p:clrMapOvr>
+    <a:masterClrMapping/>
+  </p:clrMapOvr>
+</p:sld>
+</file>
+
+<file path=ppt/slides/slide5.xml><?xml version="1.0" encoding="utf-8"?>
+<p:sld xmlns:a="http://schemas.openxmlformats.org/drawingml/2006/main" xmlns:r="http://schemas.openxmlformats.org/officeDocument/2006/relationships" xmlns:p="http://schemas.openxmlformats.org/presentationml/2006/main">
+  <p:cSld>
+    <p:spTree>
+      <p:nvGrpSpPr>
+        <p:cNvPr id="1" name=""/>
+        <p:cNvGrpSpPr/>
+        <p:nvPr/>
+      </p:nvGrpSpPr>
+      <p:grpSpPr>
+        <a:xfrm>
+          <a:off x="0" y="0"/>
+          <a:ext cx="0" cy="0"/>
+          <a:chOff x="0" y="0"/>
+          <a:chExt cx="0" cy="0"/>
+        </a:xfrm>
+      </p:grpSpPr>
+      <p:sp>
+        <p:nvSpPr>
+          <p:cNvPr id="2" name="Title 1">
+            <a:extLst>
+              <a:ext uri="{FF2B5EF4-FFF2-40B4-BE49-F238E27FC236}">
                 <a16:creationId xmlns:a16="http://schemas.microsoft.com/office/drawing/2014/main" id="{778AF6C1-AB65-35BD-8133-F3F29DB90DD0}"/>
               </a:ext>
             </a:extLst>
@@ -8674,7 +9421,7 @@
           <a:p>
             <a:fld id="{E6AB8EDD-9EF2-4633-A1C2-4D908C1019B4}" type="slidenum">
               <a:rPr lang="he-IL" smtClean="0"/>
-              <a:t>4</a:t>
+              <a:t>5</a:t>
             </a:fld>
             <a:endParaRPr lang="he-IL"/>
           </a:p>
@@ -8693,7 +9440,7 @@
 </p:sld>
 </file>
 
-<file path=ppt/slides/slide5.xml><?xml version="1.0" encoding="utf-8"?>
+<file path=ppt/slides/slide6.xml><?xml version="1.0" encoding="utf-8"?>
 <p:sld xmlns:a="http://schemas.openxmlformats.org/drawingml/2006/main" xmlns:r="http://schemas.openxmlformats.org/officeDocument/2006/relationships" xmlns:p="http://schemas.openxmlformats.org/presentationml/2006/main">
   <p:cSld>
     <p:spTree>
@@ -8836,7 +9583,7 @@
           <a:p>
             <a:fld id="{E6AB8EDD-9EF2-4633-A1C2-4D908C1019B4}" type="slidenum">
               <a:rPr lang="he-IL" smtClean="0"/>
-              <a:t>5</a:t>
+              <a:t>6</a:t>
             </a:fld>
             <a:endParaRPr lang="he-IL"/>
           </a:p>
@@ -8855,7 +9602,7 @@
 </p:sld>
 </file>
 
-<file path=ppt/slides/slide6.xml><?xml version="1.0" encoding="utf-8"?>
+<file path=ppt/slides/slide7.xml><?xml version="1.0" encoding="utf-8"?>
 <p:sld xmlns:a="http://schemas.openxmlformats.org/drawingml/2006/main" xmlns:r="http://schemas.openxmlformats.org/officeDocument/2006/relationships" xmlns:p="http://schemas.openxmlformats.org/presentationml/2006/main">
   <p:cSld>
     <p:spTree>
@@ -8979,7 +9726,7 @@
           <a:p>
             <a:fld id="{E6AB8EDD-9EF2-4633-A1C2-4D908C1019B4}" type="slidenum">
               <a:rPr lang="he-IL" smtClean="0"/>
-              <a:t>6</a:t>
+              <a:t>7</a:t>
             </a:fld>
             <a:endParaRPr lang="he-IL"/>
           </a:p>
@@ -8998,7 +9745,7 @@
 </p:sld>
 </file>
 
-<file path=ppt/slides/slide7.xml><?xml version="1.0" encoding="utf-8"?>
+<file path=ppt/slides/slide8.xml><?xml version="1.0" encoding="utf-8"?>
 <p:sld xmlns:a="http://schemas.openxmlformats.org/drawingml/2006/main" xmlns:r="http://schemas.openxmlformats.org/officeDocument/2006/relationships" xmlns:p="http://schemas.openxmlformats.org/presentationml/2006/main">
   <p:cSld>
     <p:spTree>
@@ -9213,7 +9960,7 @@
           <a:p>
             <a:fld id="{E6AB8EDD-9EF2-4633-A1C2-4D908C1019B4}" type="slidenum">
               <a:rPr lang="he-IL" smtClean="0"/>
-              <a:t>7</a:t>
+              <a:t>8</a:t>
             </a:fld>
             <a:endParaRPr lang="he-IL"/>
           </a:p>

--- a/docs/base_slides.pptx
+++ b/docs/base_slides.pptx
@@ -1078,7 +1078,7 @@
       </dgm:t>
     </dgm:pt>
     <dgm:pt modelId="{2A8A38E9-53CA-44D5-8DFC-907932863099}">
-      <dgm:prSet/>
+      <dgm:prSet custT="1"/>
       <dgm:spPr/>
       <dgm:t>
         <a:bodyPr/>
@@ -1086,25 +1086,41 @@
         <a:p>
           <a:pPr rtl="0"/>
           <a:r>
-            <a:rPr lang="en-GB" dirty="0"/>
+            <a:rPr lang="en-GB" sz="1800" kern="1200" dirty="0"/>
             <a:t>Goal:</a:t>
           </a:r>
         </a:p>
         <a:p>
           <a:pPr rtl="0"/>
           <a:r>
-            <a:rPr lang="en-GB" dirty="0"/>
-            <a:t>Computation of </a:t>
+            <a:rPr lang="en-GB" sz="1800" kern="1200" dirty="0">
+              <a:solidFill>
+                <a:prstClr val="black">
+                  <a:hueOff val="0"/>
+                  <a:satOff val="0"/>
+                  <a:lumOff val="0"/>
+                  <a:alphaOff val="0"/>
+                </a:prstClr>
+              </a:solidFill>
+              <a:latin typeface="Calibri" panose="020F0502020204030204"/>
+              <a:ea typeface="+mn-ea"/>
+              <a:cs typeface="+mn-cs"/>
+            </a:rPr>
+            <a:t>Calculation</a:t>
           </a:r>
           <a:r>
-            <a:rPr lang="en-GB" b="1" dirty="0"/>
+            <a:rPr lang="en-GB" sz="1800" kern="1200" dirty="0"/>
+            <a:t> of </a:t>
+          </a:r>
+          <a:r>
+            <a:rPr lang="en-GB" sz="1800" b="1" kern="1200" dirty="0"/>
             <a:t>graph-based indicators </a:t>
           </a:r>
           <a:r>
-            <a:rPr lang="en-GB" dirty="0"/>
-            <a:t>(e.g., centralities) to identify information operation drivers.</a:t>
+            <a:rPr lang="en-GB" sz="1800" kern="1200" dirty="0"/>
+            <a:t>(e.g., centralities) to identify information operation (IO) drivers.</a:t>
           </a:r>
-          <a:endParaRPr lang="en-US" dirty="0"/>
+          <a:endParaRPr lang="en-US" sz="1800" kern="1200" dirty="0"/>
         </a:p>
       </dgm:t>
     </dgm:pt>
@@ -1891,8 +1907,24 @@
             <a:buNone/>
           </a:pPr>
           <a:r>
+            <a:rPr lang="en-GB" sz="1800" kern="1200" dirty="0">
+              <a:solidFill>
+                <a:prstClr val="black">
+                  <a:hueOff val="0"/>
+                  <a:satOff val="0"/>
+                  <a:lumOff val="0"/>
+                  <a:alphaOff val="0"/>
+                </a:prstClr>
+              </a:solidFill>
+              <a:latin typeface="Calibri" panose="020F0502020204030204"/>
+              <a:ea typeface="+mn-ea"/>
+              <a:cs typeface="+mn-cs"/>
+            </a:rPr>
+            <a:t>Calculation</a:t>
+          </a:r>
+          <a:r>
             <a:rPr lang="en-GB" sz="1800" kern="1200" dirty="0"/>
-            <a:t>Computation of </a:t>
+            <a:t> of </a:t>
           </a:r>
           <a:r>
             <a:rPr lang="en-GB" sz="1800" b="1" kern="1200" dirty="0"/>
@@ -1900,7 +1932,7 @@
           </a:r>
           <a:r>
             <a:rPr lang="en-GB" sz="1800" kern="1200" dirty="0"/>
-            <a:t>(e.g., centralities) to identify information operation drivers.</a:t>
+            <a:t>(e.g., centralities) to identify information operation (IO) drivers.</a:t>
           </a:r>
           <a:endParaRPr lang="en-US" sz="1800" kern="1200" dirty="0"/>
         </a:p>
@@ -3324,7 +3356,7 @@
           <a:p>
             <a:fld id="{2915196C-CDBC-4DEE-A220-849C85FC22AC}" type="datetimeFigureOut">
               <a:rPr lang="he-IL" smtClean="0"/>
-              <a:t>ה'/אדר/תשפ"ו</a:t>
+              <a:t>ו'/אדר/תשפ"ו</a:t>
             </a:fld>
             <a:endParaRPr lang="he-IL"/>
           </a:p>
@@ -4043,7 +4075,7 @@
           <a:p>
             <a:fld id="{FC6B3A86-AB79-4388-8CA5-9FC4B834779B}" type="datetime8">
               <a:rPr lang="he-IL" smtClean="0"/>
-              <a:t>22 פברואר 26</a:t>
+              <a:t>23 פברואר 26</a:t>
             </a:fld>
             <a:endParaRPr lang="he-IL"/>
           </a:p>
@@ -4266,7 +4298,7 @@
           <a:p>
             <a:fld id="{18F56BC8-8E7D-4896-9980-77BC87FB8E3E}" type="datetime8">
               <a:rPr lang="he-IL" smtClean="0"/>
-              <a:t>22 פברואר 26</a:t>
+              <a:t>23 פברואר 26</a:t>
             </a:fld>
             <a:endParaRPr lang="he-IL"/>
           </a:p>
@@ -4499,7 +4531,7 @@
           <a:p>
             <a:fld id="{0FE327C8-CB36-417E-834B-544633ADCE63}" type="datetime8">
               <a:rPr lang="he-IL" smtClean="0"/>
-              <a:t>22 פברואר 26</a:t>
+              <a:t>23 פברואר 26</a:t>
             </a:fld>
             <a:endParaRPr lang="he-IL"/>
           </a:p>
@@ -4617,7 +4649,7 @@
           <a:p>
             <a:fld id="{8E065D1C-C98B-44F5-AB2A-FEE3E85D0A94}" type="datetime8">
               <a:rPr lang="he-IL" smtClean="0"/>
-              <a:t>22 פברואר 26</a:t>
+              <a:t>23 פברואר 26</a:t>
             </a:fld>
             <a:endParaRPr lang="he-IL"/>
           </a:p>
@@ -4680,10 +4712,10 @@
       </p:sp>
       <p:pic>
         <p:nvPicPr>
-          <p:cNvPr id="9" name="Picture 8" descr="A document with text on it&#10;&#10;AI-generated content may be incorrect.">
+          <p:cNvPr id="6" name="Picture 5" descr="A document with text on it&#10;&#10;AI-generated content may be incorrect.">
             <a:extLst>
               <a:ext uri="{FF2B5EF4-FFF2-40B4-BE49-F238E27FC236}">
-                <a16:creationId xmlns:a16="http://schemas.microsoft.com/office/drawing/2014/main" id="{4A6D55D5-DFBA-E0B3-0219-6E4D255B0CDD}"/>
+                <a16:creationId xmlns:a16="http://schemas.microsoft.com/office/drawing/2014/main" id="{C90561FF-B0EA-0CEF-2458-5237DB16069C}"/>
               </a:ext>
             </a:extLst>
           </p:cNvPr>
@@ -4700,15 +4732,15 @@
               </a:ext>
             </a:extLst>
           </a:blip>
-          <a:srcRect l="11677" t="8796" r="8571" b="78403"/>
+          <a:srcRect l="11423" t="8775" r="7050" b="78302"/>
           <a:stretch>
             <a:fillRect/>
           </a:stretch>
         </p:blipFill>
         <p:spPr>
           <a:xfrm>
-            <a:off x="1072186" y="2463071"/>
-            <a:ext cx="10753557" cy="2233697"/>
+            <a:off x="1004330" y="2463070"/>
+            <a:ext cx="10889267" cy="2233697"/>
           </a:xfrm>
           <a:prstGeom prst="rect">
             <a:avLst/>
@@ -4928,7 +4960,7 @@
           <a:p>
             <a:fld id="{7634CBFB-2532-48BA-BAE2-ADD925390740}" type="datetime8">
               <a:rPr lang="he-IL" smtClean="0"/>
-              <a:t>22 פברואר 26</a:t>
+              <a:t>23 פברואר 26</a:t>
             </a:fld>
             <a:endParaRPr lang="he-IL"/>
           </a:p>
@@ -5211,7 +5243,7 @@
           <a:p>
             <a:fld id="{8EAC1FDD-37C4-4A6B-BF31-779943CE32CF}" type="datetime8">
               <a:rPr lang="he-IL" smtClean="0"/>
-              <a:t>22 פברואר 26</a:t>
+              <a:t>23 פברואר 26</a:t>
             </a:fld>
             <a:endParaRPr lang="he-IL"/>
           </a:p>
@@ -5524,7 +5556,7 @@
           <a:p>
             <a:fld id="{C73C226C-A76A-4927-8F1D-1BD4AC033ABB}" type="datetime8">
               <a:rPr lang="he-IL" smtClean="0"/>
-              <a:t>22 פברואר 26</a:t>
+              <a:t>23 פברואר 26</a:t>
             </a:fld>
             <a:endParaRPr lang="he-IL"/>
           </a:p>
@@ -6027,7 +6059,7 @@
           <a:p>
             <a:fld id="{430DF2BF-D428-43E9-B36B-6DD16CF93579}" type="datetime8">
               <a:rPr lang="he-IL" smtClean="0"/>
-              <a:t>22 פברואר 26</a:t>
+              <a:t>23 פברואר 26</a:t>
             </a:fld>
             <a:endParaRPr lang="he-IL"/>
           </a:p>
@@ -6174,7 +6206,7 @@
           <a:p>
             <a:fld id="{390A9136-4922-4C74-B05C-12CD0951E601}" type="datetime8">
               <a:rPr lang="he-IL" smtClean="0"/>
-              <a:t>22 פברואר 26</a:t>
+              <a:t>23 פברואר 26</a:t>
             </a:fld>
             <a:endParaRPr lang="he-IL"/>
           </a:p>
@@ -6292,7 +6324,7 @@
           <a:p>
             <a:fld id="{C29F3CA8-2E63-412C-AA06-0D760EBE5965}" type="datetime8">
               <a:rPr lang="he-IL" smtClean="0"/>
-              <a:t>22 פברואר 26</a:t>
+              <a:t>23 פברואר 26</a:t>
             </a:fld>
             <a:endParaRPr lang="he-IL"/>
           </a:p>
@@ -6614,7 +6646,7 @@
           <a:p>
             <a:fld id="{7AC7B867-AA4A-4FF3-AD8B-0AD0F18EE595}" type="datetime8">
               <a:rPr lang="he-IL" smtClean="0"/>
-              <a:t>22 פברואר 26</a:t>
+              <a:t>23 פברואר 26</a:t>
             </a:fld>
             <a:endParaRPr lang="he-IL"/>
           </a:p>
@@ -6912,7 +6944,7 @@
           <a:p>
             <a:fld id="{F5E9EBD3-88E8-46DB-BD3B-F935B7013014}" type="datetime8">
               <a:rPr lang="he-IL" smtClean="0"/>
-              <a:t>22 פברואר 26</a:t>
+              <a:t>23 פברואר 26</a:t>
             </a:fld>
             <a:endParaRPr lang="he-IL"/>
           </a:p>
@@ -7196,7 +7228,7 @@
           <a:p>
             <a:fld id="{8E065D1C-C98B-44F5-AB2A-FEE3E85D0A94}" type="datetime8">
               <a:rPr lang="he-IL" smtClean="0"/>
-              <a:t>22 פברואר 26</a:t>
+              <a:t>23 פברואר 26</a:t>
             </a:fld>
             <a:endParaRPr lang="he-IL"/>
           </a:p>
@@ -8433,7 +8465,7 @@
             <p:ph idx="1"/>
             <p:extLst>
               <p:ext uri="{D42A27DB-BD31-4B8C-83A1-F6EECF244321}">
-                <p14:modId xmlns:p14="http://schemas.microsoft.com/office/powerpoint/2010/main" val="1780567369"/>
+                <p14:modId xmlns:p14="http://schemas.microsoft.com/office/powerpoint/2010/main" val="3352782491"/>
               </p:ext>
             </p:extLst>
           </p:nvPr>
@@ -8521,7 +8553,7 @@
         </p:nvSpPr>
         <p:spPr>
           <a:xfrm>
-            <a:off x="3978876" y="5369012"/>
+            <a:off x="4140242" y="5342117"/>
             <a:ext cx="2117124" cy="642551"/>
           </a:xfrm>
           <a:prstGeom prst="roundRect">
@@ -8574,8 +8606,8 @@
         </p:nvCxnSpPr>
         <p:spPr>
           <a:xfrm flipV="1">
-            <a:off x="6096000" y="4399005"/>
-            <a:ext cx="928816" cy="1291283"/>
+            <a:off x="6257366" y="4446494"/>
+            <a:ext cx="869575" cy="1216899"/>
           </a:xfrm>
           <a:prstGeom prst="straightConnector1">
             <a:avLst/>
@@ -8613,7 +8645,7 @@
         </p:nvSpPr>
         <p:spPr>
           <a:xfrm>
-            <a:off x="6499653" y="5066096"/>
+            <a:off x="6625161" y="5030238"/>
             <a:ext cx="1334530" cy="523220"/>
           </a:xfrm>
           <a:prstGeom prst="rect">
@@ -8631,105 +8663,6 @@
             <a:r>
               <a:rPr lang="en-US" sz="1400" dirty="0"/>
               <a:t>Boost workflow to be decided</a:t>
-            </a:r>
-            <a:endParaRPr lang="en-IL" sz="1400" dirty="0"/>
-          </a:p>
-        </p:txBody>
-      </p:sp>
-      <p:sp>
-        <p:nvSpPr>
-          <p:cNvPr id="2" name="Rectangle: Rounded Corners 1">
-            <a:extLst>
-              <a:ext uri="{FF2B5EF4-FFF2-40B4-BE49-F238E27FC236}">
-                <a16:creationId xmlns:a16="http://schemas.microsoft.com/office/drawing/2014/main" id="{C505B61D-A950-64DC-3926-373E9764601E}"/>
-              </a:ext>
-            </a:extLst>
-          </p:cNvPr>
-          <p:cNvSpPr/>
-          <p:nvPr/>
-        </p:nvSpPr>
-        <p:spPr>
-          <a:xfrm>
-            <a:off x="9861177" y="2519082"/>
-            <a:ext cx="1936376" cy="627530"/>
-          </a:xfrm>
-          <a:prstGeom prst="roundRect">
-            <a:avLst/>
-          </a:prstGeom>
-          <a:ln w="19050"/>
-        </p:spPr>
-        <p:style>
-          <a:lnRef idx="2">
-            <a:schemeClr val="dk1"/>
-          </a:lnRef>
-          <a:fillRef idx="1">
-            <a:schemeClr val="lt1"/>
-          </a:fillRef>
-          <a:effectRef idx="0">
-            <a:schemeClr val="dk1"/>
-          </a:effectRef>
-          <a:fontRef idx="minor">
-            <a:schemeClr val="dk1"/>
-          </a:fontRef>
-        </p:style>
-        <p:txBody>
-          <a:bodyPr rtlCol="0" anchor="ctr"/>
-          <a:lstStyle/>
-          <a:p>
-            <a:pPr algn="ctr"/>
-            <a:r>
-              <a:rPr lang="en-US" dirty="0"/>
-              <a:t>4) Entities Scoring</a:t>
-            </a:r>
-            <a:endParaRPr lang="en-IL" dirty="0"/>
-          </a:p>
-        </p:txBody>
-      </p:sp>
-      <p:sp>
-        <p:nvSpPr>
-          <p:cNvPr id="3" name="Rectangle: Rounded Corners 2">
-            <a:extLst>
-              <a:ext uri="{FF2B5EF4-FFF2-40B4-BE49-F238E27FC236}">
-                <a16:creationId xmlns:a16="http://schemas.microsoft.com/office/drawing/2014/main" id="{7A45EB10-99E3-FC59-0C3A-958B459F6D25}"/>
-              </a:ext>
-            </a:extLst>
-          </p:cNvPr>
-          <p:cNvSpPr/>
-          <p:nvPr/>
-        </p:nvSpPr>
-        <p:spPr>
-          <a:xfrm>
-            <a:off x="5517050" y="3429000"/>
-            <a:ext cx="1157900" cy="211577"/>
-          </a:xfrm>
-          <a:prstGeom prst="roundRect">
-            <a:avLst/>
-          </a:prstGeom>
-        </p:spPr>
-        <p:style>
-          <a:lnRef idx="2">
-            <a:schemeClr val="accent1">
-              <a:shade val="15000"/>
-            </a:schemeClr>
-          </a:lnRef>
-          <a:fillRef idx="1">
-            <a:schemeClr val="accent1"/>
-          </a:fillRef>
-          <a:effectRef idx="0">
-            <a:schemeClr val="accent1"/>
-          </a:effectRef>
-          <a:fontRef idx="minor">
-            <a:schemeClr val="lt1"/>
-          </a:fontRef>
-        </p:style>
-        <p:txBody>
-          <a:bodyPr rtlCol="0" anchor="ctr"/>
-          <a:lstStyle/>
-          <a:p>
-            <a:pPr algn="ctr"/>
-            <a:r>
-              <a:rPr lang="en-US" sz="1400" dirty="0"/>
-              <a:t>Aggregation</a:t>
             </a:r>
             <a:endParaRPr lang="en-IL" sz="1400" dirty="0"/>
           </a:p>
@@ -8844,14 +8777,14 @@
           <p:nvPr>
             <p:extLst>
               <p:ext uri="{D42A27DB-BD31-4B8C-83A1-F6EECF244321}">
-                <p14:modId xmlns:p14="http://schemas.microsoft.com/office/powerpoint/2010/main" val="2588244266"/>
+                <p14:modId xmlns:p14="http://schemas.microsoft.com/office/powerpoint/2010/main" val="1471053291"/>
               </p:ext>
             </p:extLst>
           </p:nvPr>
         </p:nvGraphicFramePr>
         <p:xfrm>
-          <a:off x="1538615" y="1612234"/>
-          <a:ext cx="10601378" cy="5394960"/>
+          <a:off x="1296561" y="1594306"/>
+          <a:ext cx="10601378" cy="5227320"/>
         </p:xfrm>
         <a:graphic>
           <a:graphicData uri="http://schemas.openxmlformats.org/drawingml/2006/table">
@@ -8881,7 +8814,7 @@
                     <a:bodyPr/>
                     <a:lstStyle/>
                     <a:p>
-                      <a:pPr marL="0" marR="0" lvl="0" indent="0" algn="l" defTabSz="914400" rtl="0" eaLnBrk="1" fontAlgn="auto" latinLnBrk="0" hangingPunct="1">
+                      <a:pPr marL="0" marR="0" lvl="0" indent="0" algn="ctr" defTabSz="914400" rtl="0" eaLnBrk="1" fontAlgn="auto" latinLnBrk="0" hangingPunct="1">
                         <a:lnSpc>
                           <a:spcPct val="100000"/>
                         </a:lnSpc>
@@ -8907,7 +8840,7 @@
                         <a:t> </a:t>
                       </a:r>
                       <a:r>
-                        <a:rPr lang="en-GB" sz="2400" b="0" kern="1200" dirty="0">
+                        <a:rPr lang="en-GB" sz="2800" b="1" kern="1200" dirty="0">
                           <a:solidFill>
                             <a:schemeClr val="tx1"/>
                           </a:solidFill>
@@ -8918,7 +8851,7 @@
                         <a:t>Labeled </a:t>
                       </a:r>
                       <a:r>
-                        <a:rPr lang="en-US" sz="2400" b="0" kern="1200" dirty="0">
+                        <a:rPr lang="en-US" sz="2800" b="1" kern="1200" dirty="0">
                           <a:solidFill>
                             <a:schemeClr val="tx1"/>
                           </a:solidFill>
@@ -8926,11 +8859,9 @@
                           <a:ea typeface="+mn-ea"/>
                           <a:cs typeface="+mn-cs"/>
                         </a:rPr>
-                        <a:t>IO Corpus [1]</a:t>
+                        <a:t>IO Corpus</a:t>
                       </a:r>
-                    </a:p>
-                    <a:p>
-                      <a:endParaRPr lang="en-US" b="0" dirty="0">
+                      <a:endParaRPr lang="en-US" b="1" dirty="0">
                         <a:solidFill>
                           <a:schemeClr val="tx1"/>
                         </a:solidFill>
@@ -8945,12 +8876,12 @@
                         <a:buChar char="•"/>
                       </a:pPr>
                       <a:r>
-                        <a:rPr lang="en-US" b="0" dirty="0">
+                        <a:rPr lang="en-US" sz="2000" b="0" dirty="0">
                           <a:solidFill>
                             <a:schemeClr val="tx1"/>
                           </a:solidFill>
                         </a:rPr>
-                        <a:t>Curated collection of 26 Information Operation (IO) campaigns.</a:t>
+                        <a:t>Collection of 26 information operation (IO).</a:t>
                       </a:r>
                     </a:p>
                     <a:p>
@@ -8962,12 +8893,12 @@
                         <a:buChar char="•"/>
                       </a:pPr>
                       <a:r>
-                        <a:rPr lang="en-US" b="0" dirty="0">
+                        <a:rPr lang="en-US" sz="2000" b="0" dirty="0">
                           <a:solidFill>
                             <a:schemeClr val="tx1"/>
                           </a:solidFill>
                         </a:rPr>
-                        <a:t>Each campaign fully labeled (IO vs. Control accounts).</a:t>
+                        <a:t>Campaigns from multiple countries.</a:t>
                       </a:r>
                     </a:p>
                     <a:p>
@@ -8979,7 +8910,24 @@
                         <a:buChar char="•"/>
                       </a:pPr>
                       <a:r>
-                        <a:rPr lang="en-US" b="0" dirty="0">
+                        <a:rPr lang="en-US" sz="2000" b="0" dirty="0">
+                          <a:solidFill>
+                            <a:schemeClr val="tx1"/>
+                          </a:solidFill>
+                        </a:rPr>
+                        <a:t>Fully labeled (IO vs. Control accounts).</a:t>
+                      </a:r>
+                    </a:p>
+                    <a:p>
+                      <a:pPr marL="285750" indent="-285750">
+                        <a:lnSpc>
+                          <a:spcPct val="150000"/>
+                        </a:lnSpc>
+                        <a:buFont typeface="Arial" panose="020B0604020202020204" pitchFamily="34" charset="0"/>
+                        <a:buChar char="•"/>
+                      </a:pPr>
+                      <a:r>
+                        <a:rPr lang="en-US" sz="2000" b="0" dirty="0">
                           <a:solidFill>
                             <a:schemeClr val="tx1"/>
                           </a:solidFill>
@@ -8987,7 +8935,19 @@
                         </a:rPr>
                         <a:t>https://zenodo.org/records/14189193</a:t>
                       </a:r>
-                      <a:endParaRPr lang="en-US" b="0" dirty="0">
+                      <a:endParaRPr lang="en-US" sz="2000" b="0" dirty="0">
+                        <a:solidFill>
+                          <a:schemeClr val="tx1"/>
+                        </a:solidFill>
+                      </a:endParaRPr>
+                    </a:p>
+                    <a:p>
+                      <a:pPr>
+                        <a:lnSpc>
+                          <a:spcPct val="150000"/>
+                        </a:lnSpc>
+                      </a:pPr>
+                      <a:endParaRPr lang="en-US" b="1" u="sng" dirty="0">
                         <a:solidFill>
                           <a:schemeClr val="tx1"/>
                         </a:solidFill>
@@ -9000,7 +8960,7 @@
                         </a:lnSpc>
                       </a:pPr>
                       <a:r>
-                        <a:rPr lang="en-US" b="1" u="sng" dirty="0">
+                        <a:rPr lang="en-US" sz="2000" b="1" u="none" dirty="0">
                           <a:solidFill>
                             <a:schemeClr val="tx1"/>
                           </a:solidFill>
@@ -9017,7 +8977,7 @@
                         <a:buAutoNum type="arabicPeriod"/>
                       </a:pPr>
                       <a:r>
-                        <a:rPr lang="en-US" b="0" dirty="0">
+                        <a:rPr lang="en-US" sz="2000" b="0" dirty="0">
                           <a:solidFill>
                             <a:schemeClr val="tx1"/>
                           </a:solidFill>
@@ -9034,13 +8994,21 @@
                         <a:buAutoNum type="arabicPeriod"/>
                       </a:pPr>
                       <a:r>
-                        <a:rPr lang="en-US" b="0" dirty="0">
+                        <a:rPr lang="en-US" sz="2000" b="0" dirty="0">
                           <a:solidFill>
                             <a:schemeClr val="tx1"/>
                           </a:solidFill>
                         </a:rPr>
                         <a:t>700K IO tweets | 770K Control tweets</a:t>
                       </a:r>
+                      <a:endParaRPr lang="en-US" sz="2000" kern="1200" dirty="0">
+                        <a:solidFill>
+                          <a:schemeClr val="tx1"/>
+                        </a:solidFill>
+                        <a:latin typeface="+mn-lt"/>
+                        <a:ea typeface="+mn-ea"/>
+                        <a:cs typeface="+mn-cs"/>
+                      </a:endParaRPr>
                     </a:p>
                     <a:p>
                       <a:endParaRPr lang="en-IL" b="0" dirty="0">
@@ -9051,17 +9019,33 @@
                     </a:p>
                   </a:txBody>
                   <a:tcPr>
-                    <a:lnL w="12700" cmpd="sng">
+                    <a:lnL w="12700" cap="flat" cmpd="sng" algn="ctr">
                       <a:noFill/>
+                      <a:prstDash val="solid"/>
+                      <a:round/>
+                      <a:headEnd type="none" w="med" len="med"/>
+                      <a:tailEnd type="none" w="med" len="med"/>
                     </a:lnL>
-                    <a:lnR w="12700" cmpd="sng">
+                    <a:lnR w="12700" cap="flat" cmpd="sng" algn="ctr">
                       <a:noFill/>
+                      <a:prstDash val="solid"/>
+                      <a:round/>
+                      <a:headEnd type="none" w="med" len="med"/>
+                      <a:tailEnd type="none" w="med" len="med"/>
                     </a:lnR>
-                    <a:lnT w="12700" cmpd="sng">
+                    <a:lnT w="12700" cap="flat" cmpd="sng" algn="ctr">
                       <a:noFill/>
+                      <a:prstDash val="solid"/>
+                      <a:round/>
+                      <a:headEnd type="none" w="med" len="med"/>
+                      <a:tailEnd type="none" w="med" len="med"/>
                     </a:lnT>
-                    <a:lnB w="38100" cmpd="sng">
+                    <a:lnB w="12700" cap="flat" cmpd="sng" algn="ctr">
                       <a:noFill/>
+                      <a:prstDash val="solid"/>
+                      <a:round/>
+                      <a:headEnd type="none" w="med" len="med"/>
+                      <a:tailEnd type="none" w="med" len="med"/>
                     </a:lnB>
                     <a:lnTlToBr w="12700" cmpd="sng">
                       <a:noFill/>
@@ -9079,16 +9063,19 @@
                     <a:bodyPr/>
                     <a:lstStyle/>
                     <a:p>
-                      <a:pPr marL="0" indent="0">
+                      <a:pPr marL="0" indent="0" algn="ctr">
                         <a:buNone/>
                       </a:pPr>
                       <a:r>
-                        <a:rPr lang="en-US" sz="2400" b="0" dirty="0">
+                        <a:rPr lang="en-US" sz="2800" b="1" kern="1200" dirty="0">
                           <a:solidFill>
                             <a:schemeClr val="tx1"/>
                           </a:solidFill>
+                          <a:latin typeface="+mn-lt"/>
+                          <a:ea typeface="+mn-ea"/>
+                          <a:cs typeface="+mn-cs"/>
                         </a:rPr>
-                        <a:t>US 2024 Election Dataset[2]</a:t>
+                        <a:t>US 2024 Election Dataset</a:t>
                       </a:r>
                     </a:p>
                     <a:p>
@@ -9110,12 +9097,12 @@
                         <a:buChar char="•"/>
                       </a:pPr>
                       <a:r>
-                        <a:rPr lang="en-US" b="0" dirty="0">
+                        <a:rPr lang="en-US" sz="2000" b="0" dirty="0">
                           <a:solidFill>
                             <a:schemeClr val="tx1"/>
                           </a:solidFill>
                         </a:rPr>
-                        <a:t>Clean dataset with corrupted/problematic rows removed</a:t>
+                        <a:t>Clean dataset.</a:t>
                       </a:r>
                     </a:p>
                     <a:p>
@@ -9127,12 +9114,29 @@
                         <a:buChar char="•"/>
                       </a:pPr>
                       <a:r>
-                        <a:rPr lang="en-US" b="0" dirty="0">
+                        <a:rPr lang="en-US" sz="2000" b="0" dirty="0">
                           <a:solidFill>
                             <a:schemeClr val="tx1"/>
                           </a:solidFill>
                         </a:rPr>
-                        <a:t>42,211,159 tweets | January 1 – December 31, 2024</a:t>
+                        <a:t>42,211,159 tweets.</a:t>
+                      </a:r>
+                    </a:p>
+                    <a:p>
+                      <a:pPr marL="285750" indent="-285750">
+                        <a:lnSpc>
+                          <a:spcPct val="150000"/>
+                        </a:lnSpc>
+                        <a:buFont typeface="Arial" panose="020B0604020202020204" pitchFamily="34" charset="0"/>
+                        <a:buChar char="•"/>
+                      </a:pPr>
+                      <a:r>
+                        <a:rPr lang="en-US" sz="2000" b="0" dirty="0">
+                          <a:solidFill>
+                            <a:schemeClr val="tx1"/>
+                          </a:solidFill>
+                        </a:rPr>
+                        <a:t>January 1 – December 31, 2024.</a:t>
                       </a:r>
                     </a:p>
                     <a:p>
@@ -9142,10 +9146,13 @@
                         </a:lnSpc>
                       </a:pPr>
                       <a:r>
-                        <a:rPr lang="en-US" b="0" u="sng" dirty="0">
+                        <a:rPr lang="en-US" sz="2000" b="1" u="none" kern="1200" dirty="0">
                           <a:solidFill>
                             <a:schemeClr val="tx1"/>
                           </a:solidFill>
+                          <a:latin typeface="+mn-lt"/>
+                          <a:ea typeface="+mn-ea"/>
+                          <a:cs typeface="+mn-cs"/>
                         </a:rPr>
                         <a:t>Key Timeline Events</a:t>
                       </a:r>
@@ -9159,7 +9166,7 @@
                         <a:buAutoNum type="arabicPeriod"/>
                       </a:pPr>
                       <a:r>
-                        <a:rPr lang="en-US" b="0" dirty="0">
+                        <a:rPr lang="en-US" sz="1800" b="0" dirty="0">
                           <a:solidFill>
                             <a:schemeClr val="tx1"/>
                           </a:solidFill>
@@ -9176,7 +9183,7 @@
                         <a:buAutoNum type="arabicPeriod"/>
                       </a:pPr>
                       <a:r>
-                        <a:rPr lang="en-US" b="0" dirty="0">
+                        <a:rPr lang="en-US" sz="1800" b="0" dirty="0">
                           <a:solidFill>
                             <a:schemeClr val="tx1"/>
                           </a:solidFill>
@@ -9193,7 +9200,7 @@
                         <a:buAutoNum type="arabicPeriod"/>
                       </a:pPr>
                       <a:r>
-                        <a:rPr lang="en-US" b="0" dirty="0">
+                        <a:rPr lang="en-US" sz="1800" b="0" dirty="0">
                           <a:solidFill>
                             <a:schemeClr val="tx1"/>
                           </a:solidFill>
@@ -9210,7 +9217,7 @@
                         <a:buAutoNum type="arabicPeriod"/>
                       </a:pPr>
                       <a:r>
-                        <a:rPr lang="en-US" b="0" dirty="0">
+                        <a:rPr lang="en-US" sz="1800" b="0" dirty="0">
                           <a:solidFill>
                             <a:schemeClr val="tx1"/>
                           </a:solidFill>
@@ -9227,7 +9234,7 @@
                         <a:buAutoNum type="arabicPeriod"/>
                       </a:pPr>
                       <a:r>
-                        <a:rPr lang="en-US" b="0" dirty="0">
+                        <a:rPr lang="en-US" sz="1800" b="0" dirty="0">
                           <a:solidFill>
                             <a:schemeClr val="tx1"/>
                           </a:solidFill>
@@ -9251,17 +9258,33 @@
                     </a:p>
                   </a:txBody>
                   <a:tcPr>
-                    <a:lnL w="12700" cmpd="sng">
+                    <a:lnL w="12700" cap="flat" cmpd="sng" algn="ctr">
                       <a:noFill/>
+                      <a:prstDash val="solid"/>
+                      <a:round/>
+                      <a:headEnd type="none" w="med" len="med"/>
+                      <a:tailEnd type="none" w="med" len="med"/>
                     </a:lnL>
-                    <a:lnR w="12700" cmpd="sng">
+                    <a:lnR w="12700" cap="flat" cmpd="sng" algn="ctr">
                       <a:noFill/>
+                      <a:prstDash val="solid"/>
+                      <a:round/>
+                      <a:headEnd type="none" w="med" len="med"/>
+                      <a:tailEnd type="none" w="med" len="med"/>
                     </a:lnR>
-                    <a:lnT w="12700" cmpd="sng">
+                    <a:lnT w="12700" cap="flat" cmpd="sng" algn="ctr">
                       <a:noFill/>
+                      <a:prstDash val="solid"/>
+                      <a:round/>
+                      <a:headEnd type="none" w="med" len="med"/>
+                      <a:tailEnd type="none" w="med" len="med"/>
                     </a:lnT>
-                    <a:lnB w="38100" cmpd="sng">
+                    <a:lnB w="12700" cap="flat" cmpd="sng" algn="ctr">
                       <a:noFill/>
+                      <a:prstDash val="solid"/>
+                      <a:round/>
+                      <a:headEnd type="none" w="med" len="med"/>
+                      <a:tailEnd type="none" w="med" len="med"/>
                     </a:lnB>
                     <a:lnTlToBr w="12700" cmpd="sng">
                       <a:noFill/>

--- a/docs/base_slides.pptx
+++ b/docs/base_slides.pptx
@@ -5,7 +5,7 @@
     <p:sldMasterId id="2147483648" r:id="rId1"/>
   </p:sldMasterIdLst>
   <p:notesMasterIdLst>
-    <p:notesMasterId r:id="rId10"/>
+    <p:notesMasterId r:id="rId12"/>
   </p:notesMasterIdLst>
   <p:sldIdLst>
     <p:sldId id="1574" r:id="rId2"/>
@@ -15,7 +15,9 @@
     <p:sldId id="1577" r:id="rId6"/>
     <p:sldId id="1582" r:id="rId7"/>
     <p:sldId id="1583" r:id="rId8"/>
-    <p:sldId id="1628" r:id="rId9"/>
+    <p:sldId id="1591" r:id="rId9"/>
+    <p:sldId id="1628" r:id="rId10"/>
+    <p:sldId id="1613" r:id="rId11"/>
   </p:sldIdLst>
   <p:sldSz cx="12192000" cy="6858000"/>
   <p:notesSz cx="6858000" cy="9144000"/>
@@ -126,7 +128,9 @@
             <p14:sldId id="1577"/>
             <p14:sldId id="1582"/>
             <p14:sldId id="1583"/>
+            <p14:sldId id="1591"/>
             <p14:sldId id="1628"/>
+            <p14:sldId id="1613"/>
           </p14:sldIdLst>
         </p14:section>
       </p14:sectionLst>
@@ -953,7 +957,7 @@
           <a:pPr rtl="0"/>
           <a:r>
             <a:rPr lang="en-GB" dirty="0"/>
-            <a:t>successful information operation </a:t>
+            <a:t>Successful information operation </a:t>
           </a:r>
           <a:r>
             <a:rPr lang="en-GB" b="0" dirty="0"/>
@@ -1508,7 +1512,7 @@
           </a:pPr>
           <a:r>
             <a:rPr lang="en-GB" sz="1800" kern="1200" dirty="0"/>
-            <a:t>successful information operation </a:t>
+            <a:t>Successful information operation </a:t>
           </a:r>
           <a:r>
             <a:rPr lang="en-GB" sz="1800" b="0" kern="1200" dirty="0"/>
@@ -3356,7 +3360,7 @@
           <a:p>
             <a:fld id="{2915196C-CDBC-4DEE-A220-849C85FC22AC}" type="datetimeFigureOut">
               <a:rPr lang="he-IL" smtClean="0"/>
-              <a:t>ו'/אדר/תשפ"ו</a:t>
+              <a:t>י"א/אדר/תשפ"ו</a:t>
             </a:fld>
             <a:endParaRPr lang="he-IL"/>
           </a:p>
@@ -3889,6 +3893,236 @@
 </p:notes>
 </file>
 
+<file path=ppt/notesSlides/notesSlide2.xml><?xml version="1.0" encoding="utf-8"?>
+<p:notes xmlns:a="http://schemas.openxmlformats.org/drawingml/2006/main" xmlns:r="http://schemas.openxmlformats.org/officeDocument/2006/relationships" xmlns:p="http://schemas.openxmlformats.org/presentationml/2006/main">
+  <p:cSld>
+    <p:spTree>
+      <p:nvGrpSpPr>
+        <p:cNvPr id="1" name="">
+          <a:extLst>
+            <a:ext uri="{FF2B5EF4-FFF2-40B4-BE49-F238E27FC236}">
+              <a16:creationId xmlns:a16="http://schemas.microsoft.com/office/drawing/2014/main" id="{5F2D1760-78DB-D18D-FBB8-239E0A7E745F}"/>
+            </a:ext>
+          </a:extLst>
+        </p:cNvPr>
+        <p:cNvGrpSpPr/>
+        <p:nvPr/>
+      </p:nvGrpSpPr>
+      <p:grpSpPr>
+        <a:xfrm>
+          <a:off x="0" y="0"/>
+          <a:ext cx="0" cy="0"/>
+          <a:chOff x="0" y="0"/>
+          <a:chExt cx="0" cy="0"/>
+        </a:xfrm>
+      </p:grpSpPr>
+      <p:sp>
+        <p:nvSpPr>
+          <p:cNvPr id="2" name="Slide Image Placeholder 1">
+            <a:extLst>
+              <a:ext uri="{FF2B5EF4-FFF2-40B4-BE49-F238E27FC236}">
+                <a16:creationId xmlns:a16="http://schemas.microsoft.com/office/drawing/2014/main" id="{502EC71B-5AA6-886B-0231-A74B41DE5028}"/>
+              </a:ext>
+            </a:extLst>
+          </p:cNvPr>
+          <p:cNvSpPr>
+            <a:spLocks noGrp="1" noRot="1" noChangeAspect="1"/>
+          </p:cNvSpPr>
+          <p:nvPr>
+            <p:ph type="sldImg"/>
+          </p:nvPr>
+        </p:nvSpPr>
+        <p:spPr/>
+        <p:txBody>
+          <a:bodyPr/>
+          <a:lstStyle/>
+          <a:p>
+            <a:endParaRPr lang="en-IL"/>
+          </a:p>
+        </p:txBody>
+      </p:sp>
+      <p:sp>
+        <p:nvSpPr>
+          <p:cNvPr id="3" name="Notes Placeholder 2">
+            <a:extLst>
+              <a:ext uri="{FF2B5EF4-FFF2-40B4-BE49-F238E27FC236}">
+                <a16:creationId xmlns:a16="http://schemas.microsoft.com/office/drawing/2014/main" id="{0FD997CC-4715-39C7-93DD-C967C30807B4}"/>
+              </a:ext>
+            </a:extLst>
+          </p:cNvPr>
+          <p:cNvSpPr>
+            <a:spLocks noGrp="1"/>
+          </p:cNvSpPr>
+          <p:nvPr>
+            <p:ph type="body" idx="1"/>
+          </p:nvPr>
+        </p:nvSpPr>
+        <p:spPr/>
+        <p:txBody>
+          <a:bodyPr/>
+          <a:lstStyle/>
+          <a:p>
+            <a:endParaRPr lang="en-IL" dirty="0"/>
+          </a:p>
+        </p:txBody>
+      </p:sp>
+      <p:sp>
+        <p:nvSpPr>
+          <p:cNvPr id="4" name="Slide Number Placeholder 3">
+            <a:extLst>
+              <a:ext uri="{FF2B5EF4-FFF2-40B4-BE49-F238E27FC236}">
+                <a16:creationId xmlns:a16="http://schemas.microsoft.com/office/drawing/2014/main" id="{D1C57815-7BE0-C4B1-B3D0-083C2D02FC95}"/>
+              </a:ext>
+            </a:extLst>
+          </p:cNvPr>
+          <p:cNvSpPr>
+            <a:spLocks noGrp="1"/>
+          </p:cNvSpPr>
+          <p:nvPr>
+            <p:ph type="sldNum" sz="quarter" idx="5"/>
+          </p:nvPr>
+        </p:nvSpPr>
+        <p:spPr/>
+        <p:txBody>
+          <a:bodyPr/>
+          <a:lstStyle/>
+          <a:p>
+            <a:fld id="{7F6CD5E7-A5BE-4430-AD67-E129D63AAC5C}" type="slidenum">
+              <a:rPr lang="he-IL" smtClean="0"/>
+              <a:t>8</a:t>
+            </a:fld>
+            <a:endParaRPr lang="he-IL"/>
+          </a:p>
+        </p:txBody>
+      </p:sp>
+    </p:spTree>
+    <p:extLst>
+      <p:ext uri="{BB962C8B-B14F-4D97-AF65-F5344CB8AC3E}">
+        <p14:creationId xmlns:p14="http://schemas.microsoft.com/office/powerpoint/2010/main" val="1668725800"/>
+      </p:ext>
+    </p:extLst>
+  </p:cSld>
+  <p:clrMapOvr>
+    <a:masterClrMapping/>
+  </p:clrMapOvr>
+</p:notes>
+</file>
+
+<file path=ppt/notesSlides/notesSlide3.xml><?xml version="1.0" encoding="utf-8"?>
+<p:notes xmlns:a="http://schemas.openxmlformats.org/drawingml/2006/main" xmlns:r="http://schemas.openxmlformats.org/officeDocument/2006/relationships" xmlns:p="http://schemas.openxmlformats.org/presentationml/2006/main">
+  <p:cSld>
+    <p:spTree>
+      <p:nvGrpSpPr>
+        <p:cNvPr id="1" name="">
+          <a:extLst>
+            <a:ext uri="{FF2B5EF4-FFF2-40B4-BE49-F238E27FC236}">
+              <a16:creationId xmlns:a16="http://schemas.microsoft.com/office/drawing/2014/main" id="{F72473ED-A99E-1255-DF0A-F46C0A3F8A2E}"/>
+            </a:ext>
+          </a:extLst>
+        </p:cNvPr>
+        <p:cNvGrpSpPr/>
+        <p:nvPr/>
+      </p:nvGrpSpPr>
+      <p:grpSpPr>
+        <a:xfrm>
+          <a:off x="0" y="0"/>
+          <a:ext cx="0" cy="0"/>
+          <a:chOff x="0" y="0"/>
+          <a:chExt cx="0" cy="0"/>
+        </a:xfrm>
+      </p:grpSpPr>
+      <p:sp>
+        <p:nvSpPr>
+          <p:cNvPr id="2" name="Slide Image Placeholder 1">
+            <a:extLst>
+              <a:ext uri="{FF2B5EF4-FFF2-40B4-BE49-F238E27FC236}">
+                <a16:creationId xmlns:a16="http://schemas.microsoft.com/office/drawing/2014/main" id="{B138042E-74BF-F12B-EB05-B5A12A791608}"/>
+              </a:ext>
+            </a:extLst>
+          </p:cNvPr>
+          <p:cNvSpPr>
+            <a:spLocks noGrp="1" noRot="1" noChangeAspect="1"/>
+          </p:cNvSpPr>
+          <p:nvPr>
+            <p:ph type="sldImg"/>
+          </p:nvPr>
+        </p:nvSpPr>
+        <p:spPr/>
+        <p:txBody>
+          <a:bodyPr/>
+          <a:lstStyle/>
+          <a:p>
+            <a:endParaRPr lang="en-IL"/>
+          </a:p>
+        </p:txBody>
+      </p:sp>
+      <p:sp>
+        <p:nvSpPr>
+          <p:cNvPr id="3" name="Notes Placeholder 2">
+            <a:extLst>
+              <a:ext uri="{FF2B5EF4-FFF2-40B4-BE49-F238E27FC236}">
+                <a16:creationId xmlns:a16="http://schemas.microsoft.com/office/drawing/2014/main" id="{9FF9362C-8306-7A0F-CDF5-AFC8289AE917}"/>
+              </a:ext>
+            </a:extLst>
+          </p:cNvPr>
+          <p:cNvSpPr>
+            <a:spLocks noGrp="1"/>
+          </p:cNvSpPr>
+          <p:nvPr>
+            <p:ph type="body" idx="1"/>
+          </p:nvPr>
+        </p:nvSpPr>
+        <p:spPr/>
+        <p:txBody>
+          <a:bodyPr/>
+          <a:lstStyle/>
+          <a:p>
+            <a:endParaRPr lang="en-IL" dirty="0"/>
+          </a:p>
+        </p:txBody>
+      </p:sp>
+      <p:sp>
+        <p:nvSpPr>
+          <p:cNvPr id="4" name="Slide Number Placeholder 3">
+            <a:extLst>
+              <a:ext uri="{FF2B5EF4-FFF2-40B4-BE49-F238E27FC236}">
+                <a16:creationId xmlns:a16="http://schemas.microsoft.com/office/drawing/2014/main" id="{7C4EDC18-E9C8-4ECA-7039-35E23F9D9DA3}"/>
+              </a:ext>
+            </a:extLst>
+          </p:cNvPr>
+          <p:cNvSpPr>
+            <a:spLocks noGrp="1"/>
+          </p:cNvSpPr>
+          <p:nvPr>
+            <p:ph type="sldNum" sz="quarter" idx="5"/>
+          </p:nvPr>
+        </p:nvSpPr>
+        <p:spPr/>
+        <p:txBody>
+          <a:bodyPr/>
+          <a:lstStyle/>
+          <a:p>
+            <a:fld id="{7F6CD5E7-A5BE-4430-AD67-E129D63AAC5C}" type="slidenum">
+              <a:rPr lang="he-IL" smtClean="0"/>
+              <a:t>10</a:t>
+            </a:fld>
+            <a:endParaRPr lang="he-IL"/>
+          </a:p>
+        </p:txBody>
+      </p:sp>
+    </p:spTree>
+    <p:extLst>
+      <p:ext uri="{BB962C8B-B14F-4D97-AF65-F5344CB8AC3E}">
+        <p14:creationId xmlns:p14="http://schemas.microsoft.com/office/powerpoint/2010/main" val="2057236096"/>
+      </p:ext>
+    </p:extLst>
+  </p:cSld>
+  <p:clrMapOvr>
+    <a:masterClrMapping/>
+  </p:clrMapOvr>
+</p:notes>
+</file>
+
 <file path=ppt/slideLayouts/slideLayout1.xml><?xml version="1.0" encoding="utf-8"?>
 <p:sldLayout xmlns:a="http://schemas.openxmlformats.org/drawingml/2006/main" xmlns:r="http://schemas.openxmlformats.org/officeDocument/2006/relationships" xmlns:p="http://schemas.openxmlformats.org/presentationml/2006/main" type="title" preserve="1">
   <p:cSld name="Title Slide">
@@ -4075,7 +4309,7 @@
           <a:p>
             <a:fld id="{FC6B3A86-AB79-4388-8CA5-9FC4B834779B}" type="datetime8">
               <a:rPr lang="he-IL" smtClean="0"/>
-              <a:t>23 פברואר 26</a:t>
+              <a:t>28 פברואר 26</a:t>
             </a:fld>
             <a:endParaRPr lang="he-IL"/>
           </a:p>
@@ -4298,7 +4532,7 @@
           <a:p>
             <a:fld id="{18F56BC8-8E7D-4896-9980-77BC87FB8E3E}" type="datetime8">
               <a:rPr lang="he-IL" smtClean="0"/>
-              <a:t>23 פברואר 26</a:t>
+              <a:t>28 פברואר 26</a:t>
             </a:fld>
             <a:endParaRPr lang="he-IL"/>
           </a:p>
@@ -4531,7 +4765,7 @@
           <a:p>
             <a:fld id="{0FE327C8-CB36-417E-834B-544633ADCE63}" type="datetime8">
               <a:rPr lang="he-IL" smtClean="0"/>
-              <a:t>23 פברואר 26</a:t>
+              <a:t>28 פברואר 26</a:t>
             </a:fld>
             <a:endParaRPr lang="he-IL"/>
           </a:p>
@@ -4649,7 +4883,7 @@
           <a:p>
             <a:fld id="{8E065D1C-C98B-44F5-AB2A-FEE3E85D0A94}" type="datetime8">
               <a:rPr lang="he-IL" smtClean="0"/>
-              <a:t>23 פברואר 26</a:t>
+              <a:t>28 פברואר 26</a:t>
             </a:fld>
             <a:endParaRPr lang="he-IL"/>
           </a:p>
@@ -4712,10 +4946,10 @@
       </p:sp>
       <p:pic>
         <p:nvPicPr>
-          <p:cNvPr id="6" name="Picture 5" descr="A document with text on it&#10;&#10;AI-generated content may be incorrect.">
-            <a:extLst>
-              <a:ext uri="{FF2B5EF4-FFF2-40B4-BE49-F238E27FC236}">
-                <a16:creationId xmlns:a16="http://schemas.microsoft.com/office/drawing/2014/main" id="{C90561FF-B0EA-0CEF-2458-5237DB16069C}"/>
+          <p:cNvPr id="7" name="Picture 6" descr="A document with text on it&#10;&#10;AI-generated content may be incorrect.">
+            <a:extLst>
+              <a:ext uri="{FF2B5EF4-FFF2-40B4-BE49-F238E27FC236}">
+                <a16:creationId xmlns:a16="http://schemas.microsoft.com/office/drawing/2014/main" id="{221434F7-1295-8CB3-5E53-891A52C3D78D}"/>
               </a:ext>
             </a:extLst>
           </p:cNvPr>
@@ -4732,15 +4966,15 @@
               </a:ext>
             </a:extLst>
           </a:blip>
-          <a:srcRect l="11423" t="8775" r="7050" b="78302"/>
+          <a:srcRect l="11606" t="8664" r="8034" b="78094"/>
           <a:stretch>
             <a:fillRect/>
           </a:stretch>
         </p:blipFill>
         <p:spPr>
           <a:xfrm>
-            <a:off x="1004330" y="2463070"/>
-            <a:ext cx="10889267" cy="2233697"/>
+            <a:off x="1038256" y="2478278"/>
+            <a:ext cx="10821413" cy="2294289"/>
           </a:xfrm>
           <a:prstGeom prst="rect">
             <a:avLst/>
@@ -4960,7 +5194,7 @@
           <a:p>
             <a:fld id="{7634CBFB-2532-48BA-BAE2-ADD925390740}" type="datetime8">
               <a:rPr lang="he-IL" smtClean="0"/>
-              <a:t>23 פברואר 26</a:t>
+              <a:t>28 פברואר 26</a:t>
             </a:fld>
             <a:endParaRPr lang="he-IL"/>
           </a:p>
@@ -5243,7 +5477,7 @@
           <a:p>
             <a:fld id="{8EAC1FDD-37C4-4A6B-BF31-779943CE32CF}" type="datetime8">
               <a:rPr lang="he-IL" smtClean="0"/>
-              <a:t>23 פברואר 26</a:t>
+              <a:t>28 פברואר 26</a:t>
             </a:fld>
             <a:endParaRPr lang="he-IL"/>
           </a:p>
@@ -5556,7 +5790,7 @@
           <a:p>
             <a:fld id="{C73C226C-A76A-4927-8F1D-1BD4AC033ABB}" type="datetime8">
               <a:rPr lang="he-IL" smtClean="0"/>
-              <a:t>23 פברואר 26</a:t>
+              <a:t>28 פברואר 26</a:t>
             </a:fld>
             <a:endParaRPr lang="he-IL"/>
           </a:p>
@@ -6059,7 +6293,7 @@
           <a:p>
             <a:fld id="{430DF2BF-D428-43E9-B36B-6DD16CF93579}" type="datetime8">
               <a:rPr lang="he-IL" smtClean="0"/>
-              <a:t>23 פברואר 26</a:t>
+              <a:t>28 פברואר 26</a:t>
             </a:fld>
             <a:endParaRPr lang="he-IL"/>
           </a:p>
@@ -6206,7 +6440,7 @@
           <a:p>
             <a:fld id="{390A9136-4922-4C74-B05C-12CD0951E601}" type="datetime8">
               <a:rPr lang="he-IL" smtClean="0"/>
-              <a:t>23 פברואר 26</a:t>
+              <a:t>28 פברואר 26</a:t>
             </a:fld>
             <a:endParaRPr lang="he-IL"/>
           </a:p>
@@ -6324,7 +6558,7 @@
           <a:p>
             <a:fld id="{C29F3CA8-2E63-412C-AA06-0D760EBE5965}" type="datetime8">
               <a:rPr lang="he-IL" smtClean="0"/>
-              <a:t>23 פברואר 26</a:t>
+              <a:t>28 פברואר 26</a:t>
             </a:fld>
             <a:endParaRPr lang="he-IL"/>
           </a:p>
@@ -6646,7 +6880,7 @@
           <a:p>
             <a:fld id="{7AC7B867-AA4A-4FF3-AD8B-0AD0F18EE595}" type="datetime8">
               <a:rPr lang="he-IL" smtClean="0"/>
-              <a:t>23 פברואר 26</a:t>
+              <a:t>28 פברואר 26</a:t>
             </a:fld>
             <a:endParaRPr lang="he-IL"/>
           </a:p>
@@ -6944,7 +7178,7 @@
           <a:p>
             <a:fld id="{F5E9EBD3-88E8-46DB-BD3B-F935B7013014}" type="datetime8">
               <a:rPr lang="he-IL" smtClean="0"/>
-              <a:t>23 פברואר 26</a:t>
+              <a:t>28 פברואר 26</a:t>
             </a:fld>
             <a:endParaRPr lang="he-IL"/>
           </a:p>
@@ -7228,7 +7462,7 @@
           <a:p>
             <a:fld id="{8E065D1C-C98B-44F5-AB2A-FEE3E85D0A94}" type="datetime8">
               <a:rPr lang="he-IL" smtClean="0"/>
-              <a:t>23 פברואר 26</a:t>
+              <a:t>28 פברואר 26</a:t>
             </a:fld>
             <a:endParaRPr lang="he-IL"/>
           </a:p>
@@ -8037,7 +8271,7 @@
                   <a:prstClr val="white"/>
                 </a:solidFill>
               </a:rPr>
-              <a:t>31.12.3000</a:t>
+              <a:t>30.12.3000</a:t>
             </a:r>
           </a:p>
           <a:p>
@@ -8344,6 +8578,715 @@
 </p:sld>
 </file>
 
+<file path=ppt/slides/slide10.xml><?xml version="1.0" encoding="utf-8"?>
+<p:sld xmlns:a="http://schemas.openxmlformats.org/drawingml/2006/main" xmlns:r="http://schemas.openxmlformats.org/officeDocument/2006/relationships" xmlns:p="http://schemas.openxmlformats.org/presentationml/2006/main">
+  <p:cSld>
+    <p:spTree>
+      <p:nvGrpSpPr>
+        <p:cNvPr id="1" name="">
+          <a:extLst>
+            <a:ext uri="{FF2B5EF4-FFF2-40B4-BE49-F238E27FC236}">
+              <a16:creationId xmlns:a16="http://schemas.microsoft.com/office/drawing/2014/main" id="{4F0BEF17-A85B-69A7-4947-96097D1A5F5B}"/>
+            </a:ext>
+          </a:extLst>
+        </p:cNvPr>
+        <p:cNvGrpSpPr/>
+        <p:nvPr/>
+      </p:nvGrpSpPr>
+      <p:grpSpPr>
+        <a:xfrm>
+          <a:off x="0" y="0"/>
+          <a:ext cx="0" cy="0"/>
+          <a:chOff x="0" y="0"/>
+          <a:chExt cx="0" cy="0"/>
+        </a:xfrm>
+      </p:grpSpPr>
+      <p:sp>
+        <p:nvSpPr>
+          <p:cNvPr id="2" name="Title 1">
+            <a:extLst>
+              <a:ext uri="{FF2B5EF4-FFF2-40B4-BE49-F238E27FC236}">
+                <a16:creationId xmlns:a16="http://schemas.microsoft.com/office/drawing/2014/main" id="{F80E2D88-5AB1-052E-FB13-E091040FA2F1}"/>
+              </a:ext>
+            </a:extLst>
+          </p:cNvPr>
+          <p:cNvSpPr>
+            <a:spLocks noGrp="1"/>
+          </p:cNvSpPr>
+          <p:nvPr>
+            <p:ph type="title"/>
+          </p:nvPr>
+        </p:nvSpPr>
+        <p:spPr>
+          <a:xfrm>
+            <a:off x="3072268" y="401637"/>
+            <a:ext cx="8949044" cy="1325563"/>
+          </a:xfrm>
+        </p:spPr>
+        <p:txBody>
+          <a:bodyPr>
+            <a:normAutofit/>
+          </a:bodyPr>
+          <a:lstStyle/>
+          <a:p>
+            <a:r>
+              <a:rPr lang="en-GB" dirty="0"/>
+              <a:t>Backbone Graph &amp; IO Indicators</a:t>
+            </a:r>
+            <a:endParaRPr lang="en-IL" dirty="0"/>
+          </a:p>
+        </p:txBody>
+      </p:sp>
+      <p:sp>
+        <p:nvSpPr>
+          <p:cNvPr id="4" name="Slide Number Placeholder 3">
+            <a:extLst>
+              <a:ext uri="{FF2B5EF4-FFF2-40B4-BE49-F238E27FC236}">
+                <a16:creationId xmlns:a16="http://schemas.microsoft.com/office/drawing/2014/main" id="{9A45DFBC-E283-482F-07BA-A333B9108357}"/>
+              </a:ext>
+            </a:extLst>
+          </p:cNvPr>
+          <p:cNvSpPr>
+            <a:spLocks noGrp="1"/>
+          </p:cNvSpPr>
+          <p:nvPr>
+            <p:ph type="sldNum" sz="quarter" idx="12"/>
+          </p:nvPr>
+        </p:nvSpPr>
+        <p:spPr/>
+        <p:txBody>
+          <a:bodyPr/>
+          <a:lstStyle/>
+          <a:p>
+            <a:fld id="{E6AB8EDD-9EF2-4633-A1C2-4D908C1019B4}" type="slidenum">
+              <a:rPr lang="he-IL" smtClean="0"/>
+              <a:t>10</a:t>
+            </a:fld>
+            <a:endParaRPr lang="he-IL"/>
+          </a:p>
+        </p:txBody>
+      </p:sp>
+      <p:pic>
+        <p:nvPicPr>
+          <p:cNvPr id="8" name="Content Placeholder 7" descr="A network of dots and lines&#10;&#10;AI-generated content may be incorrect.">
+            <a:extLst>
+              <a:ext uri="{FF2B5EF4-FFF2-40B4-BE49-F238E27FC236}">
+                <a16:creationId xmlns:a16="http://schemas.microsoft.com/office/drawing/2014/main" id="{66A4053E-AB18-5F2F-D1F0-F2B2E5298473}"/>
+              </a:ext>
+            </a:extLst>
+          </p:cNvPr>
+          <p:cNvPicPr>
+            <a:picLocks noGrp="1" noChangeAspect="1"/>
+          </p:cNvPicPr>
+          <p:nvPr>
+            <p:ph idx="1"/>
+          </p:nvPr>
+        </p:nvPicPr>
+        <p:blipFill>
+          <a:blip r:embed="rId3">
+            <a:extLst>
+              <a:ext uri="{28A0092B-C50C-407E-A947-70E740481C1C}">
+                <a14:useLocalDpi xmlns:a14="http://schemas.microsoft.com/office/drawing/2010/main" val="0"/>
+              </a:ext>
+            </a:extLst>
+          </a:blip>
+          <a:srcRect l="3852" t="3063" r="4355"/>
+          <a:stretch>
+            <a:fillRect/>
+          </a:stretch>
+        </p:blipFill>
+        <p:spPr>
+          <a:xfrm>
+            <a:off x="1616927" y="1630362"/>
+            <a:ext cx="6362773" cy="5176361"/>
+          </a:xfrm>
+        </p:spPr>
+      </p:pic>
+      <p:sp>
+        <p:nvSpPr>
+          <p:cNvPr id="5" name="Flowchart: Connector 4">
+            <a:extLst>
+              <a:ext uri="{FF2B5EF4-FFF2-40B4-BE49-F238E27FC236}">
+                <a16:creationId xmlns:a16="http://schemas.microsoft.com/office/drawing/2014/main" id="{94C0EF37-C21E-64B9-190B-12A5FFAC380E}"/>
+              </a:ext>
+            </a:extLst>
+          </p:cNvPr>
+          <p:cNvSpPr/>
+          <p:nvPr/>
+        </p:nvSpPr>
+        <p:spPr>
+          <a:xfrm>
+            <a:off x="6840109" y="4305300"/>
+            <a:ext cx="558911" cy="559646"/>
+          </a:xfrm>
+          <a:prstGeom prst="flowChartConnector">
+            <a:avLst/>
+          </a:prstGeom>
+          <a:noFill/>
+          <a:ln w="57150">
+            <a:solidFill>
+              <a:schemeClr val="accent1"/>
+            </a:solidFill>
+          </a:ln>
+        </p:spPr>
+        <p:style>
+          <a:lnRef idx="2">
+            <a:schemeClr val="accent1">
+              <a:shade val="15000"/>
+            </a:schemeClr>
+          </a:lnRef>
+          <a:fillRef idx="1">
+            <a:schemeClr val="accent1"/>
+          </a:fillRef>
+          <a:effectRef idx="0">
+            <a:schemeClr val="accent1"/>
+          </a:effectRef>
+          <a:fontRef idx="minor">
+            <a:schemeClr val="lt1"/>
+          </a:fontRef>
+        </p:style>
+        <p:txBody>
+          <a:bodyPr rtlCol="0" anchor="ctr"/>
+          <a:lstStyle/>
+          <a:p>
+            <a:pPr algn="ctr"/>
+            <a:endParaRPr lang="en-IL"/>
+          </a:p>
+        </p:txBody>
+      </p:sp>
+      <p:sp>
+        <p:nvSpPr>
+          <p:cNvPr id="6" name="Flowchart: Connector 5">
+            <a:extLst>
+              <a:ext uri="{FF2B5EF4-FFF2-40B4-BE49-F238E27FC236}">
+                <a16:creationId xmlns:a16="http://schemas.microsoft.com/office/drawing/2014/main" id="{D78D894D-6702-3125-2BFF-3DB2ECBA4904}"/>
+              </a:ext>
+            </a:extLst>
+          </p:cNvPr>
+          <p:cNvSpPr/>
+          <p:nvPr/>
+        </p:nvSpPr>
+        <p:spPr>
+          <a:xfrm>
+            <a:off x="8256994" y="2008500"/>
+            <a:ext cx="360000" cy="360000"/>
+          </a:xfrm>
+          <a:prstGeom prst="flowChartConnector">
+            <a:avLst/>
+          </a:prstGeom>
+          <a:noFill/>
+          <a:ln w="57150">
+            <a:solidFill>
+              <a:schemeClr val="accent1"/>
+            </a:solidFill>
+          </a:ln>
+        </p:spPr>
+        <p:style>
+          <a:lnRef idx="2">
+            <a:schemeClr val="accent1">
+              <a:shade val="15000"/>
+            </a:schemeClr>
+          </a:lnRef>
+          <a:fillRef idx="1">
+            <a:schemeClr val="accent1"/>
+          </a:fillRef>
+          <a:effectRef idx="0">
+            <a:schemeClr val="accent1"/>
+          </a:effectRef>
+          <a:fontRef idx="minor">
+            <a:schemeClr val="lt1"/>
+          </a:fontRef>
+        </p:style>
+        <p:txBody>
+          <a:bodyPr rtlCol="0" anchor="ctr"/>
+          <a:lstStyle/>
+          <a:p>
+            <a:pPr algn="ctr"/>
+            <a:endParaRPr lang="en-IL"/>
+          </a:p>
+        </p:txBody>
+      </p:sp>
+      <p:sp>
+        <p:nvSpPr>
+          <p:cNvPr id="7" name="TextBox 6">
+            <a:extLst>
+              <a:ext uri="{FF2B5EF4-FFF2-40B4-BE49-F238E27FC236}">
+                <a16:creationId xmlns:a16="http://schemas.microsoft.com/office/drawing/2014/main" id="{0199B6F5-B9F8-08F7-1704-81E9386024CC}"/>
+              </a:ext>
+            </a:extLst>
+          </p:cNvPr>
+          <p:cNvSpPr txBox="1"/>
+          <p:nvPr/>
+        </p:nvSpPr>
+        <p:spPr>
+          <a:xfrm>
+            <a:off x="8824162" y="1983610"/>
+            <a:ext cx="2630126" cy="369332"/>
+          </a:xfrm>
+          <a:prstGeom prst="rect">
+            <a:avLst/>
+          </a:prstGeom>
+          <a:noFill/>
+        </p:spPr>
+        <p:txBody>
+          <a:bodyPr wrap="square" rtlCol="0">
+            <a:spAutoFit/>
+          </a:bodyPr>
+          <a:lstStyle/>
+          <a:p>
+            <a:r>
+              <a:rPr lang="en-US" dirty="0"/>
+              <a:t>high </a:t>
+            </a:r>
+            <a:r>
+              <a:rPr lang="en-GB" dirty="0"/>
+              <a:t>degree centrality </a:t>
+            </a:r>
+            <a:endParaRPr lang="en-IL" dirty="0"/>
+          </a:p>
+        </p:txBody>
+      </p:sp>
+      <p:sp>
+        <p:nvSpPr>
+          <p:cNvPr id="9" name="Flowchart: Connector 8">
+            <a:extLst>
+              <a:ext uri="{FF2B5EF4-FFF2-40B4-BE49-F238E27FC236}">
+                <a16:creationId xmlns:a16="http://schemas.microsoft.com/office/drawing/2014/main" id="{755C2BB5-5CCD-8048-0623-B56A7107E499}"/>
+              </a:ext>
+            </a:extLst>
+          </p:cNvPr>
+          <p:cNvSpPr/>
+          <p:nvPr/>
+        </p:nvSpPr>
+        <p:spPr>
+          <a:xfrm>
+            <a:off x="1738768" y="3086616"/>
+            <a:ext cx="1057772" cy="891024"/>
+          </a:xfrm>
+          <a:prstGeom prst="flowChartConnector">
+            <a:avLst/>
+          </a:prstGeom>
+          <a:noFill/>
+          <a:ln w="57150">
+            <a:solidFill>
+              <a:srgbClr val="F59120"/>
+            </a:solidFill>
+          </a:ln>
+        </p:spPr>
+        <p:style>
+          <a:lnRef idx="2">
+            <a:schemeClr val="accent1">
+              <a:shade val="15000"/>
+            </a:schemeClr>
+          </a:lnRef>
+          <a:fillRef idx="1">
+            <a:schemeClr val="accent1"/>
+          </a:fillRef>
+          <a:effectRef idx="0">
+            <a:schemeClr val="accent1"/>
+          </a:effectRef>
+          <a:fontRef idx="minor">
+            <a:schemeClr val="lt1"/>
+          </a:fontRef>
+        </p:style>
+        <p:txBody>
+          <a:bodyPr rtlCol="0" anchor="ctr"/>
+          <a:lstStyle/>
+          <a:p>
+            <a:pPr algn="ctr"/>
+            <a:endParaRPr lang="en-IL"/>
+          </a:p>
+        </p:txBody>
+      </p:sp>
+      <p:sp>
+        <p:nvSpPr>
+          <p:cNvPr id="10" name="Flowchart: Connector 9">
+            <a:extLst>
+              <a:ext uri="{FF2B5EF4-FFF2-40B4-BE49-F238E27FC236}">
+                <a16:creationId xmlns:a16="http://schemas.microsoft.com/office/drawing/2014/main" id="{28978A85-2029-EA91-65C8-D4836607FD42}"/>
+              </a:ext>
+            </a:extLst>
+          </p:cNvPr>
+          <p:cNvSpPr/>
+          <p:nvPr/>
+        </p:nvSpPr>
+        <p:spPr>
+          <a:xfrm>
+            <a:off x="8256994" y="3116584"/>
+            <a:ext cx="360000" cy="360000"/>
+          </a:xfrm>
+          <a:prstGeom prst="flowChartConnector">
+            <a:avLst/>
+          </a:prstGeom>
+          <a:noFill/>
+          <a:ln w="57150">
+            <a:solidFill>
+              <a:srgbClr val="F59120"/>
+            </a:solidFill>
+          </a:ln>
+        </p:spPr>
+        <p:style>
+          <a:lnRef idx="2">
+            <a:schemeClr val="accent1">
+              <a:shade val="15000"/>
+            </a:schemeClr>
+          </a:lnRef>
+          <a:fillRef idx="1">
+            <a:schemeClr val="accent1"/>
+          </a:fillRef>
+          <a:effectRef idx="0">
+            <a:schemeClr val="accent1"/>
+          </a:effectRef>
+          <a:fontRef idx="minor">
+            <a:schemeClr val="lt1"/>
+          </a:fontRef>
+        </p:style>
+        <p:txBody>
+          <a:bodyPr rtlCol="0" anchor="ctr"/>
+          <a:lstStyle/>
+          <a:p>
+            <a:pPr algn="ctr"/>
+            <a:endParaRPr lang="en-IL"/>
+          </a:p>
+        </p:txBody>
+      </p:sp>
+      <p:sp>
+        <p:nvSpPr>
+          <p:cNvPr id="11" name="TextBox 10">
+            <a:extLst>
+              <a:ext uri="{FF2B5EF4-FFF2-40B4-BE49-F238E27FC236}">
+                <a16:creationId xmlns:a16="http://schemas.microsoft.com/office/drawing/2014/main" id="{F3425336-454F-FE31-1422-436892C703EC}"/>
+              </a:ext>
+            </a:extLst>
+          </p:cNvPr>
+          <p:cNvSpPr txBox="1"/>
+          <p:nvPr/>
+        </p:nvSpPr>
+        <p:spPr>
+          <a:xfrm>
+            <a:off x="8824162" y="3095422"/>
+            <a:ext cx="2630126" cy="369332"/>
+          </a:xfrm>
+          <a:prstGeom prst="rect">
+            <a:avLst/>
+          </a:prstGeom>
+          <a:noFill/>
+        </p:spPr>
+        <p:txBody>
+          <a:bodyPr wrap="square" rtlCol="0">
+            <a:spAutoFit/>
+          </a:bodyPr>
+          <a:lstStyle/>
+          <a:p>
+            <a:r>
+              <a:rPr lang="en-US" dirty="0"/>
+              <a:t>high </a:t>
+            </a:r>
+            <a:r>
+              <a:rPr lang="en-GB" dirty="0"/>
+              <a:t>k-core</a:t>
+            </a:r>
+            <a:endParaRPr lang="en-IL" dirty="0"/>
+          </a:p>
+        </p:txBody>
+      </p:sp>
+      <p:sp>
+        <p:nvSpPr>
+          <p:cNvPr id="12" name="Flowchart: Connector 11">
+            <a:extLst>
+              <a:ext uri="{FF2B5EF4-FFF2-40B4-BE49-F238E27FC236}">
+                <a16:creationId xmlns:a16="http://schemas.microsoft.com/office/drawing/2014/main" id="{871B8A36-FB76-083A-5FA0-EA7EA872E11A}"/>
+              </a:ext>
+            </a:extLst>
+          </p:cNvPr>
+          <p:cNvSpPr/>
+          <p:nvPr/>
+        </p:nvSpPr>
+        <p:spPr>
+          <a:xfrm>
+            <a:off x="8256994" y="3670626"/>
+            <a:ext cx="360000" cy="360000"/>
+          </a:xfrm>
+          <a:prstGeom prst="flowChartConnector">
+            <a:avLst/>
+          </a:prstGeom>
+          <a:noFill/>
+          <a:ln w="57150">
+            <a:solidFill>
+              <a:srgbClr val="F58377"/>
+            </a:solidFill>
+          </a:ln>
+        </p:spPr>
+        <p:style>
+          <a:lnRef idx="2">
+            <a:schemeClr val="accent1">
+              <a:shade val="15000"/>
+            </a:schemeClr>
+          </a:lnRef>
+          <a:fillRef idx="1">
+            <a:schemeClr val="accent1"/>
+          </a:fillRef>
+          <a:effectRef idx="0">
+            <a:schemeClr val="accent1"/>
+          </a:effectRef>
+          <a:fontRef idx="minor">
+            <a:schemeClr val="lt1"/>
+          </a:fontRef>
+        </p:style>
+        <p:txBody>
+          <a:bodyPr rtlCol="0" anchor="ctr"/>
+          <a:lstStyle/>
+          <a:p>
+            <a:pPr algn="ctr"/>
+            <a:endParaRPr lang="en-IL"/>
+          </a:p>
+        </p:txBody>
+      </p:sp>
+      <p:sp>
+        <p:nvSpPr>
+          <p:cNvPr id="13" name="Flowchart: Connector 12">
+            <a:extLst>
+              <a:ext uri="{FF2B5EF4-FFF2-40B4-BE49-F238E27FC236}">
+                <a16:creationId xmlns:a16="http://schemas.microsoft.com/office/drawing/2014/main" id="{BCE1F5E2-96CB-66E7-B575-B51DA37B4E37}"/>
+              </a:ext>
+            </a:extLst>
+          </p:cNvPr>
+          <p:cNvSpPr/>
+          <p:nvPr/>
+        </p:nvSpPr>
+        <p:spPr>
+          <a:xfrm>
+            <a:off x="3481782" y="3449324"/>
+            <a:ext cx="2251102" cy="1539240"/>
+          </a:xfrm>
+          <a:prstGeom prst="flowChartConnector">
+            <a:avLst/>
+          </a:prstGeom>
+          <a:noFill/>
+          <a:ln w="57150">
+            <a:solidFill>
+              <a:srgbClr val="F58377"/>
+            </a:solidFill>
+          </a:ln>
+        </p:spPr>
+        <p:style>
+          <a:lnRef idx="2">
+            <a:schemeClr val="accent1">
+              <a:shade val="15000"/>
+            </a:schemeClr>
+          </a:lnRef>
+          <a:fillRef idx="1">
+            <a:schemeClr val="accent1"/>
+          </a:fillRef>
+          <a:effectRef idx="0">
+            <a:schemeClr val="accent1"/>
+          </a:effectRef>
+          <a:fontRef idx="minor">
+            <a:schemeClr val="lt1"/>
+          </a:fontRef>
+        </p:style>
+        <p:txBody>
+          <a:bodyPr rtlCol="0" anchor="ctr"/>
+          <a:lstStyle/>
+          <a:p>
+            <a:pPr algn="ctr"/>
+            <a:endParaRPr lang="en-IL"/>
+          </a:p>
+        </p:txBody>
+      </p:sp>
+      <p:sp>
+        <p:nvSpPr>
+          <p:cNvPr id="14" name="TextBox 13">
+            <a:extLst>
+              <a:ext uri="{FF2B5EF4-FFF2-40B4-BE49-F238E27FC236}">
+                <a16:creationId xmlns:a16="http://schemas.microsoft.com/office/drawing/2014/main" id="{78B54FF2-3B58-D836-F1A2-897465C04679}"/>
+              </a:ext>
+            </a:extLst>
+          </p:cNvPr>
+          <p:cNvSpPr txBox="1"/>
+          <p:nvPr/>
+        </p:nvSpPr>
+        <p:spPr>
+          <a:xfrm>
+            <a:off x="8824162" y="3698672"/>
+            <a:ext cx="2630126" cy="369332"/>
+          </a:xfrm>
+          <a:prstGeom prst="rect">
+            <a:avLst/>
+          </a:prstGeom>
+          <a:noFill/>
+        </p:spPr>
+        <p:txBody>
+          <a:bodyPr wrap="square" rtlCol="0">
+            <a:spAutoFit/>
+          </a:bodyPr>
+          <a:lstStyle/>
+          <a:p>
+            <a:r>
+              <a:rPr lang="en-US" dirty="0"/>
+              <a:t>all high</a:t>
+            </a:r>
+            <a:endParaRPr lang="en-IL" dirty="0"/>
+          </a:p>
+        </p:txBody>
+      </p:sp>
+      <p:sp>
+        <p:nvSpPr>
+          <p:cNvPr id="15" name="Flowchart: Connector 14">
+            <a:extLst>
+              <a:ext uri="{FF2B5EF4-FFF2-40B4-BE49-F238E27FC236}">
+                <a16:creationId xmlns:a16="http://schemas.microsoft.com/office/drawing/2014/main" id="{BCFD6D60-027A-1FE4-805D-AC0BDD584F9A}"/>
+              </a:ext>
+            </a:extLst>
+          </p:cNvPr>
+          <p:cNvSpPr/>
+          <p:nvPr/>
+        </p:nvSpPr>
+        <p:spPr>
+          <a:xfrm>
+            <a:off x="8256994" y="2562542"/>
+            <a:ext cx="360000" cy="360000"/>
+          </a:xfrm>
+          <a:prstGeom prst="flowChartConnector">
+            <a:avLst/>
+          </a:prstGeom>
+          <a:noFill/>
+          <a:ln w="57150">
+            <a:solidFill>
+              <a:srgbClr val="7030A0"/>
+            </a:solidFill>
+          </a:ln>
+        </p:spPr>
+        <p:style>
+          <a:lnRef idx="2">
+            <a:schemeClr val="accent1">
+              <a:shade val="15000"/>
+            </a:schemeClr>
+          </a:lnRef>
+          <a:fillRef idx="1">
+            <a:schemeClr val="accent1"/>
+          </a:fillRef>
+          <a:effectRef idx="0">
+            <a:schemeClr val="accent1"/>
+          </a:effectRef>
+          <a:fontRef idx="minor">
+            <a:schemeClr val="lt1"/>
+          </a:fontRef>
+        </p:style>
+        <p:txBody>
+          <a:bodyPr rtlCol="0" anchor="ctr"/>
+          <a:lstStyle/>
+          <a:p>
+            <a:pPr algn="ctr"/>
+            <a:endParaRPr lang="en-IL"/>
+          </a:p>
+        </p:txBody>
+      </p:sp>
+      <p:sp>
+        <p:nvSpPr>
+          <p:cNvPr id="16" name="TextBox 15">
+            <a:extLst>
+              <a:ext uri="{FF2B5EF4-FFF2-40B4-BE49-F238E27FC236}">
+                <a16:creationId xmlns:a16="http://schemas.microsoft.com/office/drawing/2014/main" id="{99FBBC2B-DFD1-CC39-847A-385C36AC7347}"/>
+              </a:ext>
+            </a:extLst>
+          </p:cNvPr>
+          <p:cNvSpPr txBox="1"/>
+          <p:nvPr/>
+        </p:nvSpPr>
+        <p:spPr>
+          <a:xfrm>
+            <a:off x="8824162" y="2553210"/>
+            <a:ext cx="2837294" cy="369332"/>
+          </a:xfrm>
+          <a:prstGeom prst="rect">
+            <a:avLst/>
+          </a:prstGeom>
+          <a:noFill/>
+        </p:spPr>
+        <p:txBody>
+          <a:bodyPr wrap="square" rtlCol="0">
+            <a:spAutoFit/>
+          </a:bodyPr>
+          <a:lstStyle/>
+          <a:p>
+            <a:r>
+              <a:rPr lang="en-US" dirty="0"/>
+              <a:t>high </a:t>
+            </a:r>
+            <a:r>
+              <a:rPr lang="en-GB" dirty="0"/>
+              <a:t>eigenvector centrality </a:t>
+            </a:r>
+            <a:endParaRPr lang="en-IL" dirty="0"/>
+          </a:p>
+        </p:txBody>
+      </p:sp>
+      <p:sp>
+        <p:nvSpPr>
+          <p:cNvPr id="17" name="Flowchart: Connector 16">
+            <a:extLst>
+              <a:ext uri="{FF2B5EF4-FFF2-40B4-BE49-F238E27FC236}">
+                <a16:creationId xmlns:a16="http://schemas.microsoft.com/office/drawing/2014/main" id="{87C4792C-A2E7-5B20-B256-55095FB999CA}"/>
+              </a:ext>
+            </a:extLst>
+          </p:cNvPr>
+          <p:cNvSpPr/>
+          <p:nvPr/>
+        </p:nvSpPr>
+        <p:spPr>
+          <a:xfrm>
+            <a:off x="4708538" y="2184404"/>
+            <a:ext cx="966331" cy="825496"/>
+          </a:xfrm>
+          <a:prstGeom prst="flowChartConnector">
+            <a:avLst/>
+          </a:prstGeom>
+          <a:noFill/>
+          <a:ln w="57150">
+            <a:solidFill>
+              <a:srgbClr val="7030A0"/>
+            </a:solidFill>
+          </a:ln>
+        </p:spPr>
+        <p:style>
+          <a:lnRef idx="2">
+            <a:schemeClr val="accent1">
+              <a:shade val="15000"/>
+            </a:schemeClr>
+          </a:lnRef>
+          <a:fillRef idx="1">
+            <a:schemeClr val="accent1"/>
+          </a:fillRef>
+          <a:effectRef idx="0">
+            <a:schemeClr val="accent1"/>
+          </a:effectRef>
+          <a:fontRef idx="minor">
+            <a:schemeClr val="lt1"/>
+          </a:fontRef>
+        </p:style>
+        <p:txBody>
+          <a:bodyPr rtlCol="0" anchor="ctr"/>
+          <a:lstStyle/>
+          <a:p>
+            <a:pPr algn="ctr"/>
+            <a:endParaRPr lang="en-IL"/>
+          </a:p>
+        </p:txBody>
+      </p:sp>
+    </p:spTree>
+    <p:extLst>
+      <p:ext uri="{BB962C8B-B14F-4D97-AF65-F5344CB8AC3E}">
+        <p14:creationId xmlns:p14="http://schemas.microsoft.com/office/powerpoint/2010/main" val="1680593382"/>
+      </p:ext>
+    </p:extLst>
+  </p:cSld>
+  <p:clrMapOvr>
+    <a:masterClrMapping/>
+  </p:clrMapOvr>
+</p:sld>
+</file>
+
 <file path=ppt/slides/slide2.xml><?xml version="1.0" encoding="utf-8"?>
 <p:sld xmlns:a="http://schemas.openxmlformats.org/drawingml/2006/main" xmlns:r="http://schemas.openxmlformats.org/officeDocument/2006/relationships" xmlns:p="http://schemas.openxmlformats.org/presentationml/2006/main">
   <p:cSld>
@@ -8465,7 +9408,7 @@
             <p:ph idx="1"/>
             <p:extLst>
               <p:ext uri="{D42A27DB-BD31-4B8C-83A1-F6EECF244321}">
-                <p14:modId xmlns:p14="http://schemas.microsoft.com/office/powerpoint/2010/main" val="3352782491"/>
+                <p14:modId xmlns:p14="http://schemas.microsoft.com/office/powerpoint/2010/main" val="3370926029"/>
               </p:ext>
             </p:extLst>
           </p:nvPr>
@@ -8553,8 +9496,8 @@
         </p:nvSpPr>
         <p:spPr>
           <a:xfrm>
-            <a:off x="4140242" y="5342117"/>
-            <a:ext cx="2117124" cy="642551"/>
+            <a:off x="3932608" y="5410867"/>
+            <a:ext cx="2149642" cy="642551"/>
           </a:xfrm>
           <a:prstGeom prst="roundRect">
             <a:avLst/>
@@ -8606,8 +9549,8 @@
         </p:nvCxnSpPr>
         <p:spPr>
           <a:xfrm flipV="1">
-            <a:off x="6257366" y="4446494"/>
-            <a:ext cx="869575" cy="1216899"/>
+            <a:off x="6082250" y="4455122"/>
+            <a:ext cx="834189" cy="1277021"/>
           </a:xfrm>
           <a:prstGeom prst="straightConnector1">
             <a:avLst/>
@@ -9387,14 +10330,13 @@
           <a:bodyPr/>
           <a:lstStyle/>
           <a:p>
-            <a:pPr fontAlgn="base"/>
             <a:r>
               <a:rPr lang="en-GB" b="1" dirty="0"/>
               <a:t>Information Operation (IO):</a:t>
             </a:r>
             <a:r>
               <a:rPr lang="en-GB" dirty="0"/>
-              <a:t> A collection of publications produced by a set of actors performing similar or complementary actions in pursuit of a shared intent  while misleading others.</a:t>
+              <a:t> A collection of publications by coordinated actors pursuing a shared intent while misleading others.</a:t>
             </a:r>
           </a:p>
           <a:p>
@@ -9773,6 +10715,188 @@
   <p:cSld>
     <p:spTree>
       <p:nvGrpSpPr>
+        <p:cNvPr id="1" name="">
+          <a:extLst>
+            <a:ext uri="{FF2B5EF4-FFF2-40B4-BE49-F238E27FC236}">
+              <a16:creationId xmlns:a16="http://schemas.microsoft.com/office/drawing/2014/main" id="{858E27CD-C8FF-B185-45D8-666A78A68D92}"/>
+            </a:ext>
+          </a:extLst>
+        </p:cNvPr>
+        <p:cNvGrpSpPr/>
+        <p:nvPr/>
+      </p:nvGrpSpPr>
+      <p:grpSpPr>
+        <a:xfrm>
+          <a:off x="0" y="0"/>
+          <a:ext cx="0" cy="0"/>
+          <a:chOff x="0" y="0"/>
+          <a:chExt cx="0" cy="0"/>
+        </a:xfrm>
+      </p:grpSpPr>
+      <p:sp>
+        <p:nvSpPr>
+          <p:cNvPr id="2" name="Title 1">
+            <a:extLst>
+              <a:ext uri="{FF2B5EF4-FFF2-40B4-BE49-F238E27FC236}">
+                <a16:creationId xmlns:a16="http://schemas.microsoft.com/office/drawing/2014/main" id="{A5798079-07AB-1011-721B-DDEB468739BA}"/>
+              </a:ext>
+            </a:extLst>
+          </p:cNvPr>
+          <p:cNvSpPr>
+            <a:spLocks noGrp="1"/>
+          </p:cNvSpPr>
+          <p:nvPr>
+            <p:ph type="title"/>
+          </p:nvPr>
+        </p:nvSpPr>
+        <p:spPr>
+          <a:xfrm>
+            <a:off x="3072268" y="401637"/>
+            <a:ext cx="8949044" cy="1325563"/>
+          </a:xfrm>
+        </p:spPr>
+        <p:txBody>
+          <a:bodyPr>
+            <a:normAutofit/>
+          </a:bodyPr>
+          <a:lstStyle/>
+          <a:p>
+            <a:r>
+              <a:rPr lang="en-GB" dirty="0"/>
+              <a:t>Backbone Graph</a:t>
+            </a:r>
+            <a:endParaRPr lang="en-IL" dirty="0"/>
+          </a:p>
+        </p:txBody>
+      </p:sp>
+      <p:sp>
+        <p:nvSpPr>
+          <p:cNvPr id="3" name="Content Placeholder 2">
+            <a:extLst>
+              <a:ext uri="{FF2B5EF4-FFF2-40B4-BE49-F238E27FC236}">
+                <a16:creationId xmlns:a16="http://schemas.microsoft.com/office/drawing/2014/main" id="{5FBFF6C3-80E1-C75C-69F0-3A7FFA1D100D}"/>
+              </a:ext>
+            </a:extLst>
+          </p:cNvPr>
+          <p:cNvSpPr>
+            <a:spLocks noGrp="1"/>
+          </p:cNvSpPr>
+          <p:nvPr>
+            <p:ph idx="1"/>
+          </p:nvPr>
+        </p:nvSpPr>
+        <p:spPr>
+          <a:xfrm>
+            <a:off x="1243087" y="1825624"/>
+            <a:ext cx="10582656" cy="4441825"/>
+          </a:xfrm>
+        </p:spPr>
+        <p:txBody>
+          <a:bodyPr>
+            <a:normAutofit/>
+          </a:bodyPr>
+          <a:lstStyle/>
+          <a:p>
+            <a:r>
+              <a:rPr lang="en-GB" sz="2800" b="1" dirty="0"/>
+              <a:t>Nodes:</a:t>
+            </a:r>
+            <a:r>
+              <a:rPr lang="en-GB" sz="2800" dirty="0"/>
+              <a:t> Key authors.</a:t>
+            </a:r>
+          </a:p>
+          <a:p>
+            <a:r>
+              <a:rPr lang="en-GB" sz="2800" b="1" dirty="0"/>
+              <a:t>Edges: </a:t>
+            </a:r>
+            <a:r>
+              <a:rPr lang="en-GB" sz="2800" dirty="0"/>
+              <a:t>Represent behavioural similarity, based on co-actions (e.g. same hashtag usage, repos)</a:t>
+            </a:r>
+          </a:p>
+          <a:p>
+            <a:r>
+              <a:rPr lang="en-GB" sz="2800" b="1" dirty="0"/>
+              <a:t>Edges’ Weights:</a:t>
+            </a:r>
+            <a:r>
+              <a:rPr lang="en-GB" sz="2800" dirty="0"/>
+              <a:t> The number of the occurrences of co-actions between the authors.</a:t>
+            </a:r>
+          </a:p>
+          <a:p>
+            <a:r>
+              <a:rPr lang="en-GB" sz="2800" b="1" dirty="0"/>
+              <a:t>Purpose</a:t>
+            </a:r>
+            <a:r>
+              <a:rPr lang="en-GB" sz="2800" dirty="0"/>
+              <a:t>: Represent the discussion structure and expose signals of coordinated behaviour for IO detection.</a:t>
+            </a:r>
+          </a:p>
+          <a:p>
+            <a:endParaRPr lang="en-GB" dirty="0"/>
+          </a:p>
+          <a:p>
+            <a:endParaRPr lang="en-GB" dirty="0"/>
+          </a:p>
+          <a:p>
+            <a:pPr marL="457200" lvl="1" indent="0">
+              <a:buNone/>
+            </a:pPr>
+            <a:endParaRPr lang="en-GB" sz="3300" dirty="0"/>
+          </a:p>
+        </p:txBody>
+      </p:sp>
+      <p:sp>
+        <p:nvSpPr>
+          <p:cNvPr id="4" name="Slide Number Placeholder 3">
+            <a:extLst>
+              <a:ext uri="{FF2B5EF4-FFF2-40B4-BE49-F238E27FC236}">
+                <a16:creationId xmlns:a16="http://schemas.microsoft.com/office/drawing/2014/main" id="{705E3158-F388-D9C9-D303-42FD2F68D2FC}"/>
+              </a:ext>
+            </a:extLst>
+          </p:cNvPr>
+          <p:cNvSpPr>
+            <a:spLocks noGrp="1"/>
+          </p:cNvSpPr>
+          <p:nvPr>
+            <p:ph type="sldNum" sz="quarter" idx="12"/>
+          </p:nvPr>
+        </p:nvSpPr>
+        <p:spPr/>
+        <p:txBody>
+          <a:bodyPr/>
+          <a:lstStyle/>
+          <a:p>
+            <a:fld id="{E6AB8EDD-9EF2-4633-A1C2-4D908C1019B4}" type="slidenum">
+              <a:rPr lang="he-IL" smtClean="0"/>
+              <a:t>8</a:t>
+            </a:fld>
+            <a:endParaRPr lang="he-IL"/>
+          </a:p>
+        </p:txBody>
+      </p:sp>
+    </p:spTree>
+    <p:extLst>
+      <p:ext uri="{BB962C8B-B14F-4D97-AF65-F5344CB8AC3E}">
+        <p14:creationId xmlns:p14="http://schemas.microsoft.com/office/powerpoint/2010/main" val="3011122290"/>
+      </p:ext>
+    </p:extLst>
+  </p:cSld>
+  <p:clrMapOvr>
+    <a:masterClrMapping/>
+  </p:clrMapOvr>
+</p:sld>
+</file>
+
+<file path=ppt/slides/slide9.xml><?xml version="1.0" encoding="utf-8"?>
+<p:sld xmlns:a="http://schemas.openxmlformats.org/drawingml/2006/main" xmlns:r="http://schemas.openxmlformats.org/officeDocument/2006/relationships" xmlns:p="http://schemas.openxmlformats.org/presentationml/2006/main">
+  <p:cSld>
+    <p:spTree>
+      <p:nvGrpSpPr>
         <p:cNvPr id="1" name=""/>
         <p:cNvGrpSpPr/>
         <p:nvPr/>
@@ -9983,7 +11107,7 @@
           <a:p>
             <a:fld id="{E6AB8EDD-9EF2-4633-A1C2-4D908C1019B4}" type="slidenum">
               <a:rPr lang="he-IL" smtClean="0"/>
-              <a:t>8</a:t>
+              <a:t>9</a:t>
             </a:fld>
             <a:endParaRPr lang="he-IL"/>
           </a:p>

--- a/docs/base_slides.pptx
+++ b/docs/base_slides.pptx
@@ -3360,7 +3360,7 @@
           <a:p>
             <a:fld id="{2915196C-CDBC-4DEE-A220-849C85FC22AC}" type="datetimeFigureOut">
               <a:rPr lang="he-IL" smtClean="0"/>
-              <a:t>י"א/אדר/תשפ"ו</a:t>
+              <a:t>י"ט/אדר/תשפ"ו</a:t>
             </a:fld>
             <a:endParaRPr lang="he-IL"/>
           </a:p>
@@ -4309,7 +4309,7 @@
           <a:p>
             <a:fld id="{FC6B3A86-AB79-4388-8CA5-9FC4B834779B}" type="datetime8">
               <a:rPr lang="he-IL" smtClean="0"/>
-              <a:t>28 פברואר 26</a:t>
+              <a:t>08 מרץ 26</a:t>
             </a:fld>
             <a:endParaRPr lang="he-IL"/>
           </a:p>
@@ -4532,7 +4532,7 @@
           <a:p>
             <a:fld id="{18F56BC8-8E7D-4896-9980-77BC87FB8E3E}" type="datetime8">
               <a:rPr lang="he-IL" smtClean="0"/>
-              <a:t>28 פברואר 26</a:t>
+              <a:t>08 מרץ 26</a:t>
             </a:fld>
             <a:endParaRPr lang="he-IL"/>
           </a:p>
@@ -4765,7 +4765,7 @@
           <a:p>
             <a:fld id="{0FE327C8-CB36-417E-834B-544633ADCE63}" type="datetime8">
               <a:rPr lang="he-IL" smtClean="0"/>
-              <a:t>28 פברואר 26</a:t>
+              <a:t>08 מרץ 26</a:t>
             </a:fld>
             <a:endParaRPr lang="he-IL"/>
           </a:p>
@@ -4883,7 +4883,7 @@
           <a:p>
             <a:fld id="{8E065D1C-C98B-44F5-AB2A-FEE3E85D0A94}" type="datetime8">
               <a:rPr lang="he-IL" smtClean="0"/>
-              <a:t>28 פברואר 26</a:t>
+              <a:t>08 מרץ 26</a:t>
             </a:fld>
             <a:endParaRPr lang="he-IL"/>
           </a:p>
@@ -5194,7 +5194,7 @@
           <a:p>
             <a:fld id="{7634CBFB-2532-48BA-BAE2-ADD925390740}" type="datetime8">
               <a:rPr lang="he-IL" smtClean="0"/>
-              <a:t>28 פברואר 26</a:t>
+              <a:t>08 מרץ 26</a:t>
             </a:fld>
             <a:endParaRPr lang="he-IL"/>
           </a:p>
@@ -5477,7 +5477,7 @@
           <a:p>
             <a:fld id="{8EAC1FDD-37C4-4A6B-BF31-779943CE32CF}" type="datetime8">
               <a:rPr lang="he-IL" smtClean="0"/>
-              <a:t>28 פברואר 26</a:t>
+              <a:t>08 מרץ 26</a:t>
             </a:fld>
             <a:endParaRPr lang="he-IL"/>
           </a:p>
@@ -5790,7 +5790,7 @@
           <a:p>
             <a:fld id="{C73C226C-A76A-4927-8F1D-1BD4AC033ABB}" type="datetime8">
               <a:rPr lang="he-IL" smtClean="0"/>
-              <a:t>28 פברואר 26</a:t>
+              <a:t>08 מרץ 26</a:t>
             </a:fld>
             <a:endParaRPr lang="he-IL"/>
           </a:p>
@@ -6293,7 +6293,7 @@
           <a:p>
             <a:fld id="{430DF2BF-D428-43E9-B36B-6DD16CF93579}" type="datetime8">
               <a:rPr lang="he-IL" smtClean="0"/>
-              <a:t>28 פברואר 26</a:t>
+              <a:t>08 מרץ 26</a:t>
             </a:fld>
             <a:endParaRPr lang="he-IL"/>
           </a:p>
@@ -6440,7 +6440,7 @@
           <a:p>
             <a:fld id="{390A9136-4922-4C74-B05C-12CD0951E601}" type="datetime8">
               <a:rPr lang="he-IL" smtClean="0"/>
-              <a:t>28 פברואר 26</a:t>
+              <a:t>08 מרץ 26</a:t>
             </a:fld>
             <a:endParaRPr lang="he-IL"/>
           </a:p>
@@ -6558,7 +6558,7 @@
           <a:p>
             <a:fld id="{C29F3CA8-2E63-412C-AA06-0D760EBE5965}" type="datetime8">
               <a:rPr lang="he-IL" smtClean="0"/>
-              <a:t>28 פברואר 26</a:t>
+              <a:t>08 מרץ 26</a:t>
             </a:fld>
             <a:endParaRPr lang="he-IL"/>
           </a:p>
@@ -6880,7 +6880,7 @@
           <a:p>
             <a:fld id="{7AC7B867-AA4A-4FF3-AD8B-0AD0F18EE595}" type="datetime8">
               <a:rPr lang="he-IL" smtClean="0"/>
-              <a:t>28 פברואר 26</a:t>
+              <a:t>08 מרץ 26</a:t>
             </a:fld>
             <a:endParaRPr lang="he-IL"/>
           </a:p>
@@ -7178,7 +7178,7 @@
           <a:p>
             <a:fld id="{F5E9EBD3-88E8-46DB-BD3B-F935B7013014}" type="datetime8">
               <a:rPr lang="he-IL" smtClean="0"/>
-              <a:t>28 פברואר 26</a:t>
+              <a:t>08 מרץ 26</a:t>
             </a:fld>
             <a:endParaRPr lang="he-IL"/>
           </a:p>
@@ -7462,7 +7462,7 @@
           <a:p>
             <a:fld id="{8E065D1C-C98B-44F5-AB2A-FEE3E85D0A94}" type="datetime8">
               <a:rPr lang="he-IL" smtClean="0"/>
-              <a:t>28 פברואר 26</a:t>
+              <a:t>08 מרץ 26</a:t>
             </a:fld>
             <a:endParaRPr lang="he-IL"/>
           </a:p>
@@ -10962,17 +10962,109 @@
         </p:spPr>
         <p:txBody>
           <a:bodyPr>
-            <a:normAutofit fontScale="92500" lnSpcReduction="10000"/>
+            <a:normAutofit fontScale="92500" lnSpcReduction="20000"/>
           </a:bodyPr>
           <a:lstStyle/>
           <a:p>
             <a:r>
+              <a:rPr lang="en-GB" b="1" dirty="0"/>
+              <a:t>Degree centrality: </a:t>
+            </a:r>
+            <a:r>
+              <a:rPr lang="en-GB" dirty="0"/>
+              <a:t>Counts how many direct connections a user has.</a:t>
+            </a:r>
+          </a:p>
+          <a:p>
+            <a:r>
+              <a:rPr lang="en-GB" b="1" dirty="0"/>
+              <a:t>Betweenness centrality: </a:t>
+            </a:r>
+            <a:r>
+              <a:rPr lang="en-GB" dirty="0"/>
+              <a:t>measures how frequently a node appears on the shortest path between other.</a:t>
+            </a:r>
+          </a:p>
+          <a:p>
+            <a:r>
+              <a:rPr lang="en-GB" b="1" dirty="0"/>
+              <a:t>Harmonic centrality: </a:t>
+            </a:r>
+            <a:r>
+              <a:rPr lang="en-GB" dirty="0"/>
+              <a:t>Reflects how easily a user can reach many others in the network.</a:t>
+            </a:r>
+          </a:p>
+          <a:p>
+            <a:r>
+              <a:rPr lang="en-GB" b="1" dirty="0"/>
+              <a:t>Eigenvector centrality: </a:t>
+            </a:r>
+            <a:r>
+              <a:rPr lang="en-GB" dirty="0"/>
+              <a:t>Shows whether a user is connected to other high-scoring users.</a:t>
+            </a:r>
+          </a:p>
+          <a:p>
+            <a:r>
               <a:rPr lang="en-GB" b="1" dirty="0" err="1"/>
-              <a:t>Tfidf</a:t>
+              <a:t>Pagerank</a:t>
             </a:r>
             <a:r>
               <a:rPr lang="en-GB" b="1" dirty="0"/>
-              <a:t> sum: </a:t>
+              <a:t>: </a:t>
+            </a:r>
+            <a:r>
+              <a:rPr lang="en-GB" dirty="0"/>
+              <a:t>Estimates a user’s overall importance based on how many important users connect to them.</a:t>
+            </a:r>
+          </a:p>
+          <a:p>
+            <a:r>
+              <a:rPr lang="en-GB" b="1" dirty="0"/>
+              <a:t>K-core: </a:t>
+            </a:r>
+            <a:r>
+              <a:rPr lang="en-GB" dirty="0"/>
+              <a:t>Indicates how deeply embedded a user is within the dense group.</a:t>
+            </a:r>
+          </a:p>
+          <a:p>
+            <a:r>
+              <a:rPr lang="en-GB" b="1" dirty="0"/>
+              <a:t>Clustering: </a:t>
+            </a:r>
+            <a:r>
+              <a:rPr lang="en-GB" dirty="0"/>
+              <a:t>Measures how tightly connected a user’s </a:t>
+            </a:r>
+            <a:r>
+              <a:rPr lang="en-GB" dirty="0" err="1"/>
+              <a:t>neighbors</a:t>
+            </a:r>
+            <a:r>
+              <a:rPr lang="en-GB" dirty="0"/>
+              <a:t> are to each other.</a:t>
+            </a:r>
+          </a:p>
+          <a:p>
+            <a:r>
+              <a:rPr lang="en-GB" b="1" dirty="0"/>
+              <a:t>Square clustering: </a:t>
+            </a:r>
+            <a:r>
+              <a:rPr lang="en-GB" dirty="0"/>
+              <a:t>Measures how often a user participates in tightly connected small group structures.</a:t>
+            </a:r>
+          </a:p>
+          <a:p>
+            <a:r>
+              <a:rPr lang="en-GB" b="1"/>
+              <a:t>Key score </a:t>
+            </a:r>
+            <a:r>
+              <a:rPr lang="en-GB" b="1" dirty="0"/>
+              <a:t>sum: </a:t>
             </a:r>
             <a:r>
               <a:rPr lang="en-GB" dirty="0"/>
@@ -10990,93 +11082,11 @@
           <a:p>
             <a:r>
               <a:rPr lang="en-GB" b="1" dirty="0"/>
-              <a:t>K-core: </a:t>
+              <a:t>Key score dominance: </a:t>
             </a:r>
             <a:r>
               <a:rPr lang="en-GB" dirty="0"/>
-              <a:t>Indicates how deeply embedded a user is within the dense group.</a:t>
-            </a:r>
-          </a:p>
-          <a:p>
-            <a:r>
-              <a:rPr lang="en-GB" b="1" dirty="0" err="1"/>
-              <a:t>Pagerank</a:t>
-            </a:r>
-            <a:r>
-              <a:rPr lang="en-GB" b="1" dirty="0"/>
-              <a:t>: </a:t>
-            </a:r>
-            <a:r>
-              <a:rPr lang="en-GB" dirty="0"/>
-              <a:t>Estimates a user’s overall importance based on how many important users connect to them.</a:t>
-            </a:r>
-          </a:p>
-          <a:p>
-            <a:r>
-              <a:rPr lang="en-GB" b="1" dirty="0"/>
-              <a:t>Clustering: </a:t>
-            </a:r>
-            <a:r>
-              <a:rPr lang="en-GB" dirty="0"/>
-              <a:t>Measures how tightly connected a user’s </a:t>
-            </a:r>
-            <a:r>
-              <a:rPr lang="en-GB" dirty="0" err="1"/>
-              <a:t>neighbors</a:t>
-            </a:r>
-            <a:r>
-              <a:rPr lang="en-GB" dirty="0"/>
-              <a:t> are to each other.</a:t>
-            </a:r>
-          </a:p>
-          <a:p>
-            <a:r>
-              <a:rPr lang="en-GB" b="1" dirty="0"/>
-              <a:t>Square clustering: </a:t>
-            </a:r>
-            <a:r>
-              <a:rPr lang="en-GB" dirty="0"/>
-              <a:t>Measures how often a user participates in tightly connected small group structures.</a:t>
-            </a:r>
-          </a:p>
-          <a:p>
-            <a:r>
-              <a:rPr lang="en-GB" b="1" dirty="0"/>
-              <a:t>Degree centrality: </a:t>
-            </a:r>
-            <a:r>
-              <a:rPr lang="en-GB" dirty="0"/>
-              <a:t>Counts how many direct connections a user has.</a:t>
-            </a:r>
-          </a:p>
-          <a:p>
-            <a:r>
-              <a:rPr lang="en-GB" b="1" dirty="0"/>
-              <a:t>Eigenvector centrality: </a:t>
-            </a:r>
-            <a:r>
-              <a:rPr lang="en-GB" dirty="0"/>
-              <a:t>Shows whether a user is connected to other high-scoring users.</a:t>
-            </a:r>
-          </a:p>
-          <a:p>
-            <a:r>
-              <a:rPr lang="en-GB" b="1" dirty="0"/>
-              <a:t>Harmonic centrality: </a:t>
-            </a:r>
-            <a:r>
-              <a:rPr lang="en-GB" dirty="0"/>
-              <a:t>Reflects how easily a user can reach many others in the network.</a:t>
-            </a:r>
-          </a:p>
-          <a:p>
-            <a:r>
-              <a:rPr lang="en-GB" b="1" dirty="0"/>
-              <a:t>Betweenness centrality: </a:t>
-            </a:r>
-            <a:r>
-              <a:rPr lang="en-GB" dirty="0"/>
-              <a:t>measures how frequently a node appears on the shortest path between other,</a:t>
+              <a:t>Max score divided by total score. Higher values indicate the author mostly write in specific(s) topic(s).</a:t>
             </a:r>
           </a:p>
           <a:p>
